--- a/public/lessons/year-6-maths/summer/week-25/calculate-cuboid-volume/teaching-powerpoint-v1.pptx
+++ b/public/lessons/year-6-maths/summer/week-25/calculate-cuboid-volume/teaching-powerpoint-v1.pptx
@@ -2,24 +2,24 @@
 <file path=ppt/presentation.xml><?xml version="1.0" encoding="utf-8"?>
 <p:presentation xmlns:p="http://schemas.openxmlformats.org/presentationml/2006/main">
   <p:sldMasterIdLst>
-    <p:sldMasterId xmlns:r="http://schemas.openxmlformats.org/officeDocument/2006/relationships" id="2147483648" r:id="R47c2cc43f40d4a7e"/>
+    <p:sldMasterId xmlns:r="http://schemas.openxmlformats.org/officeDocument/2006/relationships" id="2147483648" r:id="R227fae11579e4b1f"/>
   </p:sldMasterIdLst>
   <p:notesMasterIdLst>
-    <p:notesMasterId xmlns:r="http://schemas.openxmlformats.org/officeDocument/2006/relationships" r:id="R38eccce1990146b8"/>
+    <p:notesMasterId xmlns:r="http://schemas.openxmlformats.org/officeDocument/2006/relationships" r:id="Rd962fac1bd484329"/>
   </p:notesMasterIdLst>
   <p:sldIdLst>
-    <p:sldId xmlns:r="http://schemas.openxmlformats.org/officeDocument/2006/relationships" id="256" r:id="R29ae9df2b47847b5"/>
-    <p:sldId xmlns:r="http://schemas.openxmlformats.org/officeDocument/2006/relationships" id="257" r:id="R4c71685129c04479"/>
-    <p:sldId xmlns:r="http://schemas.openxmlformats.org/officeDocument/2006/relationships" id="258" r:id="R858d5aeeda9b41de"/>
-    <p:sldId xmlns:r="http://schemas.openxmlformats.org/officeDocument/2006/relationships" id="259" r:id="R2ab8b9f97e48494e"/>
-    <p:sldId xmlns:r="http://schemas.openxmlformats.org/officeDocument/2006/relationships" id="260" r:id="R6dc953a671ee4d15"/>
-    <p:sldId xmlns:r="http://schemas.openxmlformats.org/officeDocument/2006/relationships" id="261" r:id="R34c7fd2e3f4348f0"/>
-    <p:sldId xmlns:r="http://schemas.openxmlformats.org/officeDocument/2006/relationships" id="262" r:id="R68a6d1162fdb4f13"/>
-    <p:sldId xmlns:r="http://schemas.openxmlformats.org/officeDocument/2006/relationships" id="263" r:id="Rd21db78059644f74"/>
-    <p:sldId xmlns:r="http://schemas.openxmlformats.org/officeDocument/2006/relationships" id="264" r:id="Rf6332f23526c4a1e"/>
-    <p:sldId xmlns:r="http://schemas.openxmlformats.org/officeDocument/2006/relationships" id="265" r:id="R60ecafe70cc8467b"/>
-    <p:sldId xmlns:r="http://schemas.openxmlformats.org/officeDocument/2006/relationships" id="266" r:id="Raf475ad48a3b4f9b"/>
-    <p:sldId xmlns:r="http://schemas.openxmlformats.org/officeDocument/2006/relationships" id="267" r:id="Rd0775b519aad4df4"/>
+    <p:sldId xmlns:r="http://schemas.openxmlformats.org/officeDocument/2006/relationships" id="256" r:id="Rf7f7ffac3e424669"/>
+    <p:sldId xmlns:r="http://schemas.openxmlformats.org/officeDocument/2006/relationships" id="257" r:id="Rcc5a48bf655140cf"/>
+    <p:sldId xmlns:r="http://schemas.openxmlformats.org/officeDocument/2006/relationships" id="258" r:id="R887909b4876f4582"/>
+    <p:sldId xmlns:r="http://schemas.openxmlformats.org/officeDocument/2006/relationships" id="259" r:id="Ra5f7db3eb54e4ec4"/>
+    <p:sldId xmlns:r="http://schemas.openxmlformats.org/officeDocument/2006/relationships" id="260" r:id="R434987253a104a1c"/>
+    <p:sldId xmlns:r="http://schemas.openxmlformats.org/officeDocument/2006/relationships" id="261" r:id="R7cde1c0a8bda4fbd"/>
+    <p:sldId xmlns:r="http://schemas.openxmlformats.org/officeDocument/2006/relationships" id="262" r:id="R1448b0aa846e41a7"/>
+    <p:sldId xmlns:r="http://schemas.openxmlformats.org/officeDocument/2006/relationships" id="263" r:id="R31082bd7ae9e4888"/>
+    <p:sldId xmlns:r="http://schemas.openxmlformats.org/officeDocument/2006/relationships" id="264" r:id="R1883d404f98d4492"/>
+    <p:sldId xmlns:r="http://schemas.openxmlformats.org/officeDocument/2006/relationships" id="265" r:id="Rfb17fb203e2e4397"/>
+    <p:sldId xmlns:r="http://schemas.openxmlformats.org/officeDocument/2006/relationships" id="266" r:id="R1078811547aa4391"/>
+    <p:sldId xmlns:r="http://schemas.openxmlformats.org/officeDocument/2006/relationships" id="267" r:id="R571bdbf8ae6c485a"/>
   </p:sldIdLst>
   <p:sldSz cx="12192000" cy="6858000"/>
   <p:notesSz cx="6858000" cy="9144000"/>
@@ -873,7 +873,7 @@
           <a:lstStyle xmlns:a="http://schemas.openxmlformats.org/drawingml/2006/main"/>
           <a:p xmlns:a="http://schemas.openxmlformats.org/drawingml/2006/main">
             <a:r>
-              <a:t>I do. Reveal the question, setup and each calculation stage one click at a time. Pupils watch before copying. Model answer: 420 cm3.</a:t>
+              <a:t>I do. Reveal the question, then reveal each mathematical change one click at a time. Point to the numbers and operation that changed before moving to the next line. Final answer: 420 cm3.</a:t>
             </a:r>
           </a:p>
         </p:txBody>
@@ -1291,7 +1291,7 @@
   </p:cSld>
   <p:clrMap bg1="lt1" tx1="dk1" bg2="lt2" tx2="dk2" accent1="accent1" accent2="accent2" accent3="accent3" accent4="accent4" accent5="accent5" accent6="accent6" hlink="hlink" folHlink="folHlink"/>
   <p:sldLayoutIdLst>
-    <p:sldLayoutId xmlns:r="http://schemas.openxmlformats.org/officeDocument/2006/relationships" id="2147483649" r:id="Rcbf5985198784246"/>
+    <p:sldLayoutId xmlns:r="http://schemas.openxmlformats.org/officeDocument/2006/relationships" id="2147483649" r:id="Rd3131a80d0294fc5"/>
   </p:sldLayoutIdLst>
   <p:txStyles>
     <p:titleStyle>
@@ -1842,7 +1842,7 @@
           <p:cNvPr id="12" name="">
             <a:extLst xmlns:a="http://schemas.openxmlformats.org/drawingml/2006/main">
               <a:ext uri="{FF2B5EF4-FFF2-40B4-BE49-F238E27FC236}">
-                <a16:creationId xmlns:a16="http://schemas.microsoft.com/office/drawing/2014/main" id="{2E8A2031-4BAA-4D21-8AB3-F92FDA028945}"/>
+                <a16:creationId xmlns:a16="http://schemas.microsoft.com/office/drawing/2014/main" id="{0E0310BA-3297-40E5-ABCA-FD04277B48EB}"/>
               </a:ext>
             </a:extLst>
           </p:cNvPr>
@@ -1874,7 +1874,7 @@
           <p:cNvPr id="2" name="">
             <a:extLst xmlns:a="http://schemas.openxmlformats.org/drawingml/2006/main">
               <a:ext uri="{FF2B5EF4-FFF2-40B4-BE49-F238E27FC236}">
-                <a16:creationId xmlns:a16="http://schemas.microsoft.com/office/drawing/2014/main" id="{BFC77EAA-4647-4C44-8207-55F1C8EBD7FA}"/>
+                <a16:creationId xmlns:a16="http://schemas.microsoft.com/office/drawing/2014/main" id="{7D9B376C-4E1E-4709-9EC0-FD5F02C161FC}"/>
               </a:ext>
             </a:extLst>
           </p:cNvPr>
@@ -1931,7 +1931,7 @@
           <p:cNvPr id="3" name="">
             <a:extLst xmlns:a="http://schemas.openxmlformats.org/drawingml/2006/main">
               <a:ext uri="{FF2B5EF4-FFF2-40B4-BE49-F238E27FC236}">
-                <a16:creationId xmlns:a16="http://schemas.microsoft.com/office/drawing/2014/main" id="{34EACD20-42BB-40D3-9859-C4BD37798E6A}"/>
+                <a16:creationId xmlns:a16="http://schemas.microsoft.com/office/drawing/2014/main" id="{6E1DAFE5-D6F1-4A07-A9CF-AF4C508CE1DE}"/>
               </a:ext>
             </a:extLst>
           </p:cNvPr>
@@ -1965,7 +1965,7 @@
           <p:cNvPr id="4" name="">
             <a:extLst xmlns:a="http://schemas.openxmlformats.org/drawingml/2006/main">
               <a:ext uri="{FF2B5EF4-FFF2-40B4-BE49-F238E27FC236}">
-                <a16:creationId xmlns:a16="http://schemas.microsoft.com/office/drawing/2014/main" id="{5A9F1E2D-F0FA-44E1-91B2-E8873BEBB757}"/>
+                <a16:creationId xmlns:a16="http://schemas.microsoft.com/office/drawing/2014/main" id="{1373E7DD-4962-4FF8-9081-247E8EFC12E6}"/>
               </a:ext>
             </a:extLst>
           </p:cNvPr>
@@ -2022,7 +2022,7 @@
           <p:cNvPr id="5" name="">
             <a:extLst xmlns:a="http://schemas.openxmlformats.org/drawingml/2006/main">
               <a:ext uri="{FF2B5EF4-FFF2-40B4-BE49-F238E27FC236}">
-                <a16:creationId xmlns:a16="http://schemas.microsoft.com/office/drawing/2014/main" id="{9BFB6116-E33A-4686-A684-1407320656CB}"/>
+                <a16:creationId xmlns:a16="http://schemas.microsoft.com/office/drawing/2014/main" id="{CBD73E67-1DCC-417A-9DDB-893B35FF2331}"/>
               </a:ext>
             </a:extLst>
           </p:cNvPr>
@@ -2079,7 +2079,7 @@
           <p:cNvPr id="6" name="">
             <a:extLst xmlns:a="http://schemas.openxmlformats.org/drawingml/2006/main">
               <a:ext uri="{FF2B5EF4-FFF2-40B4-BE49-F238E27FC236}">
-                <a16:creationId xmlns:a16="http://schemas.microsoft.com/office/drawing/2014/main" id="{20513CAD-0150-469C-A5CD-3B15F4155085}"/>
+                <a16:creationId xmlns:a16="http://schemas.microsoft.com/office/drawing/2014/main" id="{0499DA2E-66DA-4C75-82F7-86D3055CF911}"/>
               </a:ext>
             </a:extLst>
           </p:cNvPr>
@@ -2113,7 +2113,7 @@
           <p:cNvPr id="7" name="">
             <a:extLst xmlns:a="http://schemas.openxmlformats.org/drawingml/2006/main">
               <a:ext uri="{FF2B5EF4-FFF2-40B4-BE49-F238E27FC236}">
-                <a16:creationId xmlns:a16="http://schemas.microsoft.com/office/drawing/2014/main" id="{F69F2E34-8272-4FA1-B86F-D47222826B6A}"/>
+                <a16:creationId xmlns:a16="http://schemas.microsoft.com/office/drawing/2014/main" id="{22CBA3D3-DF0B-4FBB-BDA1-DA57040CD765}"/>
               </a:ext>
             </a:extLst>
           </p:cNvPr>
@@ -2170,7 +2170,7 @@
           <p:cNvPr id="8" name="">
             <a:extLst xmlns:a="http://schemas.openxmlformats.org/drawingml/2006/main">
               <a:ext uri="{FF2B5EF4-FFF2-40B4-BE49-F238E27FC236}">
-                <a16:creationId xmlns:a16="http://schemas.microsoft.com/office/drawing/2014/main" id="{AFA4E832-6183-465C-BE3D-05A72DA793F7}"/>
+                <a16:creationId xmlns:a16="http://schemas.microsoft.com/office/drawing/2014/main" id="{7B62F0CF-F938-4CBA-9D5B-11A28C0E72BC}"/>
               </a:ext>
             </a:extLst>
           </p:cNvPr>
@@ -2227,7 +2227,7 @@
           <p:cNvPr id="9" name="">
             <a:extLst xmlns:a="http://schemas.openxmlformats.org/drawingml/2006/main">
               <a:ext uri="{FF2B5EF4-FFF2-40B4-BE49-F238E27FC236}">
-                <a16:creationId xmlns:a16="http://schemas.microsoft.com/office/drawing/2014/main" id="{31EF76AE-6F9E-410B-BFDE-A1236BDCC6FA}"/>
+                <a16:creationId xmlns:a16="http://schemas.microsoft.com/office/drawing/2014/main" id="{32FDB594-0F81-4A77-9340-40838C3AFDD0}"/>
               </a:ext>
             </a:extLst>
           </p:cNvPr>
@@ -2284,7 +2284,7 @@
           <p:cNvPr id="10" name="">
             <a:extLst xmlns:a="http://schemas.openxmlformats.org/drawingml/2006/main">
               <a:ext uri="{FF2B5EF4-FFF2-40B4-BE49-F238E27FC236}">
-                <a16:creationId xmlns:a16="http://schemas.microsoft.com/office/drawing/2014/main" id="{6DD886EF-D2D9-4EF2-ADBD-9D3FF672A061}"/>
+                <a16:creationId xmlns:a16="http://schemas.microsoft.com/office/drawing/2014/main" id="{CEE8BF43-602D-41D7-A4E7-022A15324637}"/>
               </a:ext>
             </a:extLst>
           </p:cNvPr>
@@ -2341,7 +2341,7 @@
           <p:cNvPr id="11" name="">
             <a:extLst xmlns:a="http://schemas.openxmlformats.org/drawingml/2006/main">
               <a:ext uri="{FF2B5EF4-FFF2-40B4-BE49-F238E27FC236}">
-                <a16:creationId xmlns:a16="http://schemas.microsoft.com/office/drawing/2014/main" id="{2D56CC2B-FDC7-463E-9AFA-89EDFBA85457}"/>
+                <a16:creationId xmlns:a16="http://schemas.microsoft.com/office/drawing/2014/main" id="{9104F683-5ED1-445E-A896-7BC1E83740BE}"/>
               </a:ext>
             </a:extLst>
           </p:cNvPr>
@@ -2396,7 +2396,7 @@
     </p:spTree>
     <p:extLst>
       <p:ext uri="{BB962C8B-B14F-4D97-AF65-F5344CB8AC3E}">
-        <p14:creationId xmlns:p14="http://schemas.microsoft.com/office/powerpoint/2010/main" val="270113616"/>
+        <p14:creationId xmlns:p14="http://schemas.microsoft.com/office/powerpoint/2010/main" val="921143801"/>
       </p:ext>
     </p:extLst>
   </p:cSld>
@@ -2427,7 +2427,7 @@
           <p:cNvPr id="14" name="">
             <a:extLst xmlns:a="http://schemas.openxmlformats.org/drawingml/2006/main">
               <a:ext uri="{FF2B5EF4-FFF2-40B4-BE49-F238E27FC236}">
-                <a16:creationId xmlns:a16="http://schemas.microsoft.com/office/drawing/2014/main" id="{70807870-B227-49C3-9966-16895F713D80}"/>
+                <a16:creationId xmlns:a16="http://schemas.microsoft.com/office/drawing/2014/main" id="{58BDD8DB-768B-4629-83CE-84DBF93B7C49}"/>
               </a:ext>
             </a:extLst>
           </p:cNvPr>
@@ -2459,7 +2459,7 @@
           <p:cNvPr id="2" name="">
             <a:extLst xmlns:a="http://schemas.openxmlformats.org/drawingml/2006/main">
               <a:ext uri="{FF2B5EF4-FFF2-40B4-BE49-F238E27FC236}">
-                <a16:creationId xmlns:a16="http://schemas.microsoft.com/office/drawing/2014/main" id="{48394191-EC83-421B-B8FC-D122DD1B5CFC}"/>
+                <a16:creationId xmlns:a16="http://schemas.microsoft.com/office/drawing/2014/main" id="{3945CE2F-542D-4EA4-80A2-82669EF4CAB5}"/>
               </a:ext>
             </a:extLst>
           </p:cNvPr>
@@ -2516,7 +2516,7 @@
           <p:cNvPr id="3" name="">
             <a:extLst xmlns:a="http://schemas.openxmlformats.org/drawingml/2006/main">
               <a:ext uri="{FF2B5EF4-FFF2-40B4-BE49-F238E27FC236}">
-                <a16:creationId xmlns:a16="http://schemas.microsoft.com/office/drawing/2014/main" id="{F0126E89-99FB-4F01-9466-B756E7189F06}"/>
+                <a16:creationId xmlns:a16="http://schemas.microsoft.com/office/drawing/2014/main" id="{D65B8E14-4642-4416-9BCE-A17954DDB925}"/>
               </a:ext>
             </a:extLst>
           </p:cNvPr>
@@ -2548,7 +2548,7 @@
           <p:cNvPr id="4" name="">
             <a:extLst xmlns:a="http://schemas.openxmlformats.org/drawingml/2006/main">
               <a:ext uri="{FF2B5EF4-FFF2-40B4-BE49-F238E27FC236}">
-                <a16:creationId xmlns:a16="http://schemas.microsoft.com/office/drawing/2014/main" id="{19120CE2-7290-45D8-83DF-017954B2AC8B}"/>
+                <a16:creationId xmlns:a16="http://schemas.microsoft.com/office/drawing/2014/main" id="{DA4F7121-94F6-49ED-B9FF-AFDF8DE33C71}"/>
               </a:ext>
             </a:extLst>
           </p:cNvPr>
@@ -2605,7 +2605,7 @@
           <p:cNvPr id="5" name="">
             <a:extLst xmlns:a="http://schemas.openxmlformats.org/drawingml/2006/main">
               <a:ext uri="{FF2B5EF4-FFF2-40B4-BE49-F238E27FC236}">
-                <a16:creationId xmlns:a16="http://schemas.microsoft.com/office/drawing/2014/main" id="{4D476469-6510-47F3-AE59-299CA234BDBB}"/>
+                <a16:creationId xmlns:a16="http://schemas.microsoft.com/office/drawing/2014/main" id="{EE2C6487-6184-4D9D-A60D-2E27B7754766}"/>
               </a:ext>
             </a:extLst>
           </p:cNvPr>
@@ -2662,7 +2662,7 @@
           <p:cNvPr id="6" name="">
             <a:extLst xmlns:a="http://schemas.openxmlformats.org/drawingml/2006/main">
               <a:ext uri="{FF2B5EF4-FFF2-40B4-BE49-F238E27FC236}">
-                <a16:creationId xmlns:a16="http://schemas.microsoft.com/office/drawing/2014/main" id="{218135EF-93DD-45DA-866F-C7C8B6D0B6B2}"/>
+                <a16:creationId xmlns:a16="http://schemas.microsoft.com/office/drawing/2014/main" id="{64C97619-94CD-49E3-85FD-7D78835426F3}"/>
               </a:ext>
             </a:extLst>
           </p:cNvPr>
@@ -2719,7 +2719,7 @@
           <p:cNvPr id="7" name="">
             <a:extLst xmlns:a="http://schemas.openxmlformats.org/drawingml/2006/main">
               <a:ext uri="{FF2B5EF4-FFF2-40B4-BE49-F238E27FC236}">
-                <a16:creationId xmlns:a16="http://schemas.microsoft.com/office/drawing/2014/main" id="{404782D9-952C-4514-A092-CD094099A0E8}"/>
+                <a16:creationId xmlns:a16="http://schemas.microsoft.com/office/drawing/2014/main" id="{431FFC73-225A-46E1-8382-DF6AC471F517}"/>
               </a:ext>
             </a:extLst>
           </p:cNvPr>
@@ -2751,7 +2751,7 @@
           <p:cNvPr id="8" name="">
             <a:extLst xmlns:a="http://schemas.openxmlformats.org/drawingml/2006/main">
               <a:ext uri="{FF2B5EF4-FFF2-40B4-BE49-F238E27FC236}">
-                <a16:creationId xmlns:a16="http://schemas.microsoft.com/office/drawing/2014/main" id="{44E647C5-110F-496C-9EB4-58E39D28DE66}"/>
+                <a16:creationId xmlns:a16="http://schemas.microsoft.com/office/drawing/2014/main" id="{C7786760-0505-49E3-AE43-CEBDD7F42396}"/>
               </a:ext>
             </a:extLst>
           </p:cNvPr>
@@ -2808,7 +2808,7 @@
           <p:cNvPr id="9" name="">
             <a:extLst xmlns:a="http://schemas.openxmlformats.org/drawingml/2006/main">
               <a:ext uri="{FF2B5EF4-FFF2-40B4-BE49-F238E27FC236}">
-                <a16:creationId xmlns:a16="http://schemas.microsoft.com/office/drawing/2014/main" id="{E2AAAB48-545F-4DF6-988B-C3D2CEBD00CC}"/>
+                <a16:creationId xmlns:a16="http://schemas.microsoft.com/office/drawing/2014/main" id="{2C84785B-248C-444F-A266-B96D38E08F93}"/>
               </a:ext>
             </a:extLst>
           </p:cNvPr>
@@ -2865,7 +2865,7 @@
           <p:cNvPr id="10" name="">
             <a:extLst xmlns:a="http://schemas.openxmlformats.org/drawingml/2006/main">
               <a:ext uri="{FF2B5EF4-FFF2-40B4-BE49-F238E27FC236}">
-                <a16:creationId xmlns:a16="http://schemas.microsoft.com/office/drawing/2014/main" id="{692CA54A-D71B-44DA-94E0-DEBD67735FC2}"/>
+                <a16:creationId xmlns:a16="http://schemas.microsoft.com/office/drawing/2014/main" id="{CB43858C-6985-4E19-9EE3-DDCC1E2C565F}"/>
               </a:ext>
             </a:extLst>
           </p:cNvPr>
@@ -2922,7 +2922,7 @@
           <p:cNvPr id="11" name="">
             <a:extLst xmlns:a="http://schemas.openxmlformats.org/drawingml/2006/main">
               <a:ext uri="{FF2B5EF4-FFF2-40B4-BE49-F238E27FC236}">
-                <a16:creationId xmlns:a16="http://schemas.microsoft.com/office/drawing/2014/main" id="{E37238DC-22F9-450C-81B6-A3EF95F7382D}"/>
+                <a16:creationId xmlns:a16="http://schemas.microsoft.com/office/drawing/2014/main" id="{108F53FC-F0DA-4625-8E2E-66F7B7709C06}"/>
               </a:ext>
             </a:extLst>
           </p:cNvPr>
@@ -2979,7 +2979,7 @@
           <p:cNvPr id="12" name="">
             <a:extLst xmlns:a="http://schemas.openxmlformats.org/drawingml/2006/main">
               <a:ext uri="{FF2B5EF4-FFF2-40B4-BE49-F238E27FC236}">
-                <a16:creationId xmlns:a16="http://schemas.microsoft.com/office/drawing/2014/main" id="{7B34187F-EEC6-4ADE-8EE0-1314A11B843B}"/>
+                <a16:creationId xmlns:a16="http://schemas.microsoft.com/office/drawing/2014/main" id="{9DA6F759-C72C-48FC-A70B-8229FF6B9C06}"/>
               </a:ext>
             </a:extLst>
           </p:cNvPr>
@@ -3036,7 +3036,7 @@
           <p:cNvPr id="13" name="">
             <a:extLst xmlns:a="http://schemas.openxmlformats.org/drawingml/2006/main">
               <a:ext uri="{FF2B5EF4-FFF2-40B4-BE49-F238E27FC236}">
-                <a16:creationId xmlns:a16="http://schemas.microsoft.com/office/drawing/2014/main" id="{8DA57A44-3BFD-4513-A686-764C9D2C0E8B}"/>
+                <a16:creationId xmlns:a16="http://schemas.microsoft.com/office/drawing/2014/main" id="{B6022D8B-5AEB-432F-A5D5-4DC4A91FD35C}"/>
               </a:ext>
             </a:extLst>
           </p:cNvPr>
@@ -3091,7 +3091,7 @@
     </p:spTree>
     <p:extLst>
       <p:ext uri="{BB962C8B-B14F-4D97-AF65-F5344CB8AC3E}">
-        <p14:creationId xmlns:p14="http://schemas.microsoft.com/office/powerpoint/2010/main" val="290606665"/>
+        <p14:creationId xmlns:p14="http://schemas.microsoft.com/office/powerpoint/2010/main" val="802679331"/>
       </p:ext>
     </p:extLst>
   </p:cSld>
@@ -3292,7 +3292,7 @@
           <p:cNvPr id="19" name="">
             <a:extLst xmlns:a="http://schemas.openxmlformats.org/drawingml/2006/main">
               <a:ext uri="{FF2B5EF4-FFF2-40B4-BE49-F238E27FC236}">
-                <a16:creationId xmlns:a16="http://schemas.microsoft.com/office/drawing/2014/main" id="{7BF9F05B-6587-4007-A2FA-E86EAC7E069F}"/>
+                <a16:creationId xmlns:a16="http://schemas.microsoft.com/office/drawing/2014/main" id="{620748E1-3A9A-4F70-BDE0-AADBC9558DDC}"/>
               </a:ext>
             </a:extLst>
           </p:cNvPr>
@@ -3324,7 +3324,7 @@
           <p:cNvPr id="2" name="">
             <a:extLst xmlns:a="http://schemas.openxmlformats.org/drawingml/2006/main">
               <a:ext uri="{FF2B5EF4-FFF2-40B4-BE49-F238E27FC236}">
-                <a16:creationId xmlns:a16="http://schemas.microsoft.com/office/drawing/2014/main" id="{C4D60441-5DFF-45E2-B595-6D321B043544}"/>
+                <a16:creationId xmlns:a16="http://schemas.microsoft.com/office/drawing/2014/main" id="{06D4BC6E-00AA-40D8-BDDD-03FCDAFC81DC}"/>
               </a:ext>
             </a:extLst>
           </p:cNvPr>
@@ -3381,7 +3381,7 @@
           <p:cNvPr id="3" name="">
             <a:extLst xmlns:a="http://schemas.openxmlformats.org/drawingml/2006/main">
               <a:ext uri="{FF2B5EF4-FFF2-40B4-BE49-F238E27FC236}">
-                <a16:creationId xmlns:a16="http://schemas.microsoft.com/office/drawing/2014/main" id="{AB0C555D-2C95-4B06-AC1B-AF8A4ACDC95B}"/>
+                <a16:creationId xmlns:a16="http://schemas.microsoft.com/office/drawing/2014/main" id="{5E7F658B-2B9E-4A54-9638-B7B8D033C1DF}"/>
               </a:ext>
             </a:extLst>
           </p:cNvPr>
@@ -3413,7 +3413,7 @@
           <p:cNvPr id="4" name="">
             <a:extLst xmlns:a="http://schemas.openxmlformats.org/drawingml/2006/main">
               <a:ext uri="{FF2B5EF4-FFF2-40B4-BE49-F238E27FC236}">
-                <a16:creationId xmlns:a16="http://schemas.microsoft.com/office/drawing/2014/main" id="{1C9A5F2D-29F7-4738-8166-2800E236CF0D}"/>
+                <a16:creationId xmlns:a16="http://schemas.microsoft.com/office/drawing/2014/main" id="{1ADE1DB0-B0D3-462C-89CF-9525B097D686}"/>
               </a:ext>
             </a:extLst>
           </p:cNvPr>
@@ -3470,7 +3470,7 @@
           <p:cNvPr id="5" name="">
             <a:extLst xmlns:a="http://schemas.openxmlformats.org/drawingml/2006/main">
               <a:ext uri="{FF2B5EF4-FFF2-40B4-BE49-F238E27FC236}">
-                <a16:creationId xmlns:a16="http://schemas.microsoft.com/office/drawing/2014/main" id="{FCB767FB-2112-4610-86B6-D2CDC2196096}"/>
+                <a16:creationId xmlns:a16="http://schemas.microsoft.com/office/drawing/2014/main" id="{D2781756-D7B1-4A38-BDEF-4C1249C4B2DC}"/>
               </a:ext>
             </a:extLst>
           </p:cNvPr>
@@ -3527,7 +3527,7 @@
           <p:cNvPr id="6" name="">
             <a:extLst xmlns:a="http://schemas.openxmlformats.org/drawingml/2006/main">
               <a:ext uri="{FF2B5EF4-FFF2-40B4-BE49-F238E27FC236}">
-                <a16:creationId xmlns:a16="http://schemas.microsoft.com/office/drawing/2014/main" id="{A46040FD-FB92-4BBD-A0C2-6726859647B0}"/>
+                <a16:creationId xmlns:a16="http://schemas.microsoft.com/office/drawing/2014/main" id="{2F0ABB3D-DDFB-433D-AD2D-A9C5B7F32D07}"/>
               </a:ext>
             </a:extLst>
           </p:cNvPr>
@@ -3584,7 +3584,7 @@
           <p:cNvPr id="7" name="">
             <a:extLst xmlns:a="http://schemas.openxmlformats.org/drawingml/2006/main">
               <a:ext uri="{FF2B5EF4-FFF2-40B4-BE49-F238E27FC236}">
-                <a16:creationId xmlns:a16="http://schemas.microsoft.com/office/drawing/2014/main" id="{3523ED5A-64E0-45F9-900C-E91156D595C6}"/>
+                <a16:creationId xmlns:a16="http://schemas.microsoft.com/office/drawing/2014/main" id="{4F021925-7BE8-4DFC-84E1-95940667792B}"/>
               </a:ext>
             </a:extLst>
           </p:cNvPr>
@@ -3616,7 +3616,7 @@
           <p:cNvPr id="8" name="">
             <a:extLst xmlns:a="http://schemas.openxmlformats.org/drawingml/2006/main">
               <a:ext uri="{FF2B5EF4-FFF2-40B4-BE49-F238E27FC236}">
-                <a16:creationId xmlns:a16="http://schemas.microsoft.com/office/drawing/2014/main" id="{F94563A4-E1A2-4F3D-8BED-175AC56C75E3}"/>
+                <a16:creationId xmlns:a16="http://schemas.microsoft.com/office/drawing/2014/main" id="{E32A50EA-3669-4FEC-9FEA-B09463940830}"/>
               </a:ext>
             </a:extLst>
           </p:cNvPr>
@@ -3673,7 +3673,7 @@
           <p:cNvPr id="9" name="">
             <a:extLst xmlns:a="http://schemas.openxmlformats.org/drawingml/2006/main">
               <a:ext uri="{FF2B5EF4-FFF2-40B4-BE49-F238E27FC236}">
-                <a16:creationId xmlns:a16="http://schemas.microsoft.com/office/drawing/2014/main" id="{C80554AC-9000-40C8-9522-205E6E828432}"/>
+                <a16:creationId xmlns:a16="http://schemas.microsoft.com/office/drawing/2014/main" id="{3E86EF87-2D60-4BA1-8DD0-C6E26920AB89}"/>
               </a:ext>
             </a:extLst>
           </p:cNvPr>
@@ -3730,7 +3730,7 @@
           <p:cNvPr id="10" name="">
             <a:extLst xmlns:a="http://schemas.openxmlformats.org/drawingml/2006/main">
               <a:ext uri="{FF2B5EF4-FFF2-40B4-BE49-F238E27FC236}">
-                <a16:creationId xmlns:a16="http://schemas.microsoft.com/office/drawing/2014/main" id="{44885C4F-78D7-4101-838E-BBF23EE45E4D}"/>
+                <a16:creationId xmlns:a16="http://schemas.microsoft.com/office/drawing/2014/main" id="{5D063A05-2922-4ADE-A0F3-63B48F9F344E}"/>
               </a:ext>
             </a:extLst>
           </p:cNvPr>
@@ -3787,7 +3787,7 @@
           <p:cNvPr id="11" name="">
             <a:extLst xmlns:a="http://schemas.openxmlformats.org/drawingml/2006/main">
               <a:ext uri="{FF2B5EF4-FFF2-40B4-BE49-F238E27FC236}">
-                <a16:creationId xmlns:a16="http://schemas.microsoft.com/office/drawing/2014/main" id="{19665456-FA70-4ECA-B5F6-415B35B7BE18}"/>
+                <a16:creationId xmlns:a16="http://schemas.microsoft.com/office/drawing/2014/main" id="{747D0A3C-279E-4F64-8DA1-2AF3B6C3AC80}"/>
               </a:ext>
             </a:extLst>
           </p:cNvPr>
@@ -3821,7 +3821,7 @@
           <p:cNvPr id="12" name="">
             <a:extLst xmlns:a="http://schemas.openxmlformats.org/drawingml/2006/main">
               <a:ext uri="{FF2B5EF4-FFF2-40B4-BE49-F238E27FC236}">
-                <a16:creationId xmlns:a16="http://schemas.microsoft.com/office/drawing/2014/main" id="{F5ABFFDD-9F0F-42BD-88BC-558127BEFB94}"/>
+                <a16:creationId xmlns:a16="http://schemas.microsoft.com/office/drawing/2014/main" id="{FE17B85A-4BAB-458D-90BF-CBD6A0C87134}"/>
               </a:ext>
             </a:extLst>
           </p:cNvPr>
@@ -3878,7 +3878,7 @@
           <p:cNvPr id="13" name="">
             <a:extLst xmlns:a="http://schemas.openxmlformats.org/drawingml/2006/main">
               <a:ext uri="{FF2B5EF4-FFF2-40B4-BE49-F238E27FC236}">
-                <a16:creationId xmlns:a16="http://schemas.microsoft.com/office/drawing/2014/main" id="{9B10630D-DA5D-4B79-8B81-E253FBF2B7B0}"/>
+                <a16:creationId xmlns:a16="http://schemas.microsoft.com/office/drawing/2014/main" id="{D4A13464-6C52-453D-B6C1-4380F46C1621}"/>
               </a:ext>
             </a:extLst>
           </p:cNvPr>
@@ -3935,7 +3935,7 @@
           <p:cNvPr id="14" name="">
             <a:extLst xmlns:a="http://schemas.openxmlformats.org/drawingml/2006/main">
               <a:ext uri="{FF2B5EF4-FFF2-40B4-BE49-F238E27FC236}">
-                <a16:creationId xmlns:a16="http://schemas.microsoft.com/office/drawing/2014/main" id="{9AC289F7-E895-432A-AE09-B06E9BCDBA50}"/>
+                <a16:creationId xmlns:a16="http://schemas.microsoft.com/office/drawing/2014/main" id="{4F7ADC13-7494-4935-8BCC-1E6F773D3C7F}"/>
               </a:ext>
             </a:extLst>
           </p:cNvPr>
@@ -3992,7 +3992,7 @@
           <p:cNvPr id="15" name="">
             <a:extLst xmlns:a="http://schemas.openxmlformats.org/drawingml/2006/main">
               <a:ext uri="{FF2B5EF4-FFF2-40B4-BE49-F238E27FC236}">
-                <a16:creationId xmlns:a16="http://schemas.microsoft.com/office/drawing/2014/main" id="{1C11C9DE-29D6-4291-BE9A-100658909F7E}"/>
+                <a16:creationId xmlns:a16="http://schemas.microsoft.com/office/drawing/2014/main" id="{997B1222-8C9F-40D6-B583-5EA0C927A34E}"/>
               </a:ext>
             </a:extLst>
           </p:cNvPr>
@@ -4026,7 +4026,7 @@
           <p:cNvPr id="16" name="">
             <a:extLst xmlns:a="http://schemas.openxmlformats.org/drawingml/2006/main">
               <a:ext uri="{FF2B5EF4-FFF2-40B4-BE49-F238E27FC236}">
-                <a16:creationId xmlns:a16="http://schemas.microsoft.com/office/drawing/2014/main" id="{B83832B8-F987-4FA0-B9FD-5BE7A6F0D614}"/>
+                <a16:creationId xmlns:a16="http://schemas.microsoft.com/office/drawing/2014/main" id="{C160130E-662E-44EB-94C8-630750A99CDE}"/>
               </a:ext>
             </a:extLst>
           </p:cNvPr>
@@ -4083,7 +4083,7 @@
           <p:cNvPr id="17" name="">
             <a:extLst xmlns:a="http://schemas.openxmlformats.org/drawingml/2006/main">
               <a:ext uri="{FF2B5EF4-FFF2-40B4-BE49-F238E27FC236}">
-                <a16:creationId xmlns:a16="http://schemas.microsoft.com/office/drawing/2014/main" id="{02E411EA-80CC-4786-963B-B4B7B6C78B2B}"/>
+                <a16:creationId xmlns:a16="http://schemas.microsoft.com/office/drawing/2014/main" id="{76F1975F-7D37-4513-BBF4-350FFB01D2D3}"/>
               </a:ext>
             </a:extLst>
           </p:cNvPr>
@@ -4140,7 +4140,7 @@
           <p:cNvPr id="18" name="">
             <a:extLst xmlns:a="http://schemas.openxmlformats.org/drawingml/2006/main">
               <a:ext uri="{FF2B5EF4-FFF2-40B4-BE49-F238E27FC236}">
-                <a16:creationId xmlns:a16="http://schemas.microsoft.com/office/drawing/2014/main" id="{D8CF683E-40F0-4DCE-84A9-A1FF3EAFD866}"/>
+                <a16:creationId xmlns:a16="http://schemas.microsoft.com/office/drawing/2014/main" id="{2F3B875B-71B2-454E-BED4-6AB61A68B0F7}"/>
               </a:ext>
             </a:extLst>
           </p:cNvPr>
@@ -4195,7 +4195,7 @@
     </p:spTree>
     <p:extLst>
       <p:ext uri="{BB962C8B-B14F-4D97-AF65-F5344CB8AC3E}">
-        <p14:creationId xmlns:p14="http://schemas.microsoft.com/office/powerpoint/2010/main" val="967357163"/>
+        <p14:creationId xmlns:p14="http://schemas.microsoft.com/office/powerpoint/2010/main" val="388446155"/>
       </p:ext>
     </p:extLst>
   </p:cSld>
@@ -4350,7 +4350,7 @@
           <p:cNvPr id="23" name="">
             <a:extLst xmlns:a="http://schemas.openxmlformats.org/drawingml/2006/main">
               <a:ext uri="{FF2B5EF4-FFF2-40B4-BE49-F238E27FC236}">
-                <a16:creationId xmlns:a16="http://schemas.microsoft.com/office/drawing/2014/main" id="{9BDBCD26-B5E0-44A4-A684-A6C1E7E4D40C}"/>
+                <a16:creationId xmlns:a16="http://schemas.microsoft.com/office/drawing/2014/main" id="{B5BCE675-5EDC-4DC1-AC71-936800121BF7}"/>
               </a:ext>
             </a:extLst>
           </p:cNvPr>
@@ -4382,7 +4382,7 @@
           <p:cNvPr id="2" name="">
             <a:extLst xmlns:a="http://schemas.openxmlformats.org/drawingml/2006/main">
               <a:ext uri="{FF2B5EF4-FFF2-40B4-BE49-F238E27FC236}">
-                <a16:creationId xmlns:a16="http://schemas.microsoft.com/office/drawing/2014/main" id="{1F0EC281-518A-4FB5-A7E8-E037A450D35D}"/>
+                <a16:creationId xmlns:a16="http://schemas.microsoft.com/office/drawing/2014/main" id="{6AE28545-5E95-47FF-99E3-5B1EADDF68E4}"/>
               </a:ext>
             </a:extLst>
           </p:cNvPr>
@@ -4439,7 +4439,7 @@
           <p:cNvPr id="3" name="">
             <a:extLst xmlns:a="http://schemas.openxmlformats.org/drawingml/2006/main">
               <a:ext uri="{FF2B5EF4-FFF2-40B4-BE49-F238E27FC236}">
-                <a16:creationId xmlns:a16="http://schemas.microsoft.com/office/drawing/2014/main" id="{B3C380FE-ABA0-484B-9C05-F1457759EB43}"/>
+                <a16:creationId xmlns:a16="http://schemas.microsoft.com/office/drawing/2014/main" id="{84CE9947-D7FB-4E23-A124-1531D938BD33}"/>
               </a:ext>
             </a:extLst>
           </p:cNvPr>
@@ -4471,7 +4471,7 @@
           <p:cNvPr id="4" name="">
             <a:extLst xmlns:a="http://schemas.openxmlformats.org/drawingml/2006/main">
               <a:ext uri="{FF2B5EF4-FFF2-40B4-BE49-F238E27FC236}">
-                <a16:creationId xmlns:a16="http://schemas.microsoft.com/office/drawing/2014/main" id="{B48D0527-8F88-4C6D-8AA6-9A201EC8E1DC}"/>
+                <a16:creationId xmlns:a16="http://schemas.microsoft.com/office/drawing/2014/main" id="{43123D92-AEEB-47EA-B425-97717B6DB0AC}"/>
               </a:ext>
             </a:extLst>
           </p:cNvPr>
@@ -4528,7 +4528,7 @@
           <p:cNvPr id="5" name="">
             <a:extLst xmlns:a="http://schemas.openxmlformats.org/drawingml/2006/main">
               <a:ext uri="{FF2B5EF4-FFF2-40B4-BE49-F238E27FC236}">
-                <a16:creationId xmlns:a16="http://schemas.microsoft.com/office/drawing/2014/main" id="{112EE410-CD56-48FD-90A4-8A6E54CCFB48}"/>
+                <a16:creationId xmlns:a16="http://schemas.microsoft.com/office/drawing/2014/main" id="{318E6DAC-8A12-4EFD-A2C2-A19CFC11F81D}"/>
               </a:ext>
             </a:extLst>
           </p:cNvPr>
@@ -4585,7 +4585,7 @@
           <p:cNvPr id="6" name="">
             <a:extLst xmlns:a="http://schemas.openxmlformats.org/drawingml/2006/main">
               <a:ext uri="{FF2B5EF4-FFF2-40B4-BE49-F238E27FC236}">
-                <a16:creationId xmlns:a16="http://schemas.microsoft.com/office/drawing/2014/main" id="{BFBC2858-3F7D-4C00-BA9D-BA2262563619}"/>
+                <a16:creationId xmlns:a16="http://schemas.microsoft.com/office/drawing/2014/main" id="{2654BF27-F9BD-41A2-8248-A8BB6A77ACC1}"/>
               </a:ext>
             </a:extLst>
           </p:cNvPr>
@@ -4642,7 +4642,7 @@
           <p:cNvPr id="7" name="">
             <a:extLst xmlns:a="http://schemas.openxmlformats.org/drawingml/2006/main">
               <a:ext uri="{FF2B5EF4-FFF2-40B4-BE49-F238E27FC236}">
-                <a16:creationId xmlns:a16="http://schemas.microsoft.com/office/drawing/2014/main" id="{47D5D83B-2DF0-4E66-A03B-23D24678FB58}"/>
+                <a16:creationId xmlns:a16="http://schemas.microsoft.com/office/drawing/2014/main" id="{46DB469D-6403-414B-A495-2A021A1B8F1B}"/>
               </a:ext>
             </a:extLst>
           </p:cNvPr>
@@ -4674,7 +4674,7 @@
           <p:cNvPr id="8" name="">
             <a:extLst xmlns:a="http://schemas.openxmlformats.org/drawingml/2006/main">
               <a:ext uri="{FF2B5EF4-FFF2-40B4-BE49-F238E27FC236}">
-                <a16:creationId xmlns:a16="http://schemas.microsoft.com/office/drawing/2014/main" id="{8C444C95-3C68-405E-8BD9-918863F5FED3}"/>
+                <a16:creationId xmlns:a16="http://schemas.microsoft.com/office/drawing/2014/main" id="{2A7333A6-401A-4029-BC44-B914D5A08AC2}"/>
               </a:ext>
             </a:extLst>
           </p:cNvPr>
@@ -4731,7 +4731,7 @@
           <p:cNvPr id="9" name="">
             <a:extLst xmlns:a="http://schemas.openxmlformats.org/drawingml/2006/main">
               <a:ext uri="{FF2B5EF4-FFF2-40B4-BE49-F238E27FC236}">
-                <a16:creationId xmlns:a16="http://schemas.microsoft.com/office/drawing/2014/main" id="{F4CF4ED6-421F-432C-B375-A26FC85A58B0}"/>
+                <a16:creationId xmlns:a16="http://schemas.microsoft.com/office/drawing/2014/main" id="{2B2A18D8-775F-4FD8-8331-376215555DA1}"/>
               </a:ext>
             </a:extLst>
           </p:cNvPr>
@@ -4788,7 +4788,7 @@
           <p:cNvPr id="10" name="">
             <a:extLst xmlns:a="http://schemas.openxmlformats.org/drawingml/2006/main">
               <a:ext uri="{FF2B5EF4-FFF2-40B4-BE49-F238E27FC236}">
-                <a16:creationId xmlns:a16="http://schemas.microsoft.com/office/drawing/2014/main" id="{9ABF6B79-DDDF-4067-9A1D-68CA41F7F03B}"/>
+                <a16:creationId xmlns:a16="http://schemas.microsoft.com/office/drawing/2014/main" id="{0BC7EA43-1867-4432-999D-01132DD8647D}"/>
               </a:ext>
             </a:extLst>
           </p:cNvPr>
@@ -4822,7 +4822,7 @@
           <p:cNvPr id="11" name="">
             <a:extLst xmlns:a="http://schemas.openxmlformats.org/drawingml/2006/main">
               <a:ext uri="{FF2B5EF4-FFF2-40B4-BE49-F238E27FC236}">
-                <a16:creationId xmlns:a16="http://schemas.microsoft.com/office/drawing/2014/main" id="{A09B8BE9-73D3-4B87-8DF6-A8EB3CECC594}"/>
+                <a16:creationId xmlns:a16="http://schemas.microsoft.com/office/drawing/2014/main" id="{4C9CF9E5-6227-4A04-BCBF-0836DEC811BF}"/>
               </a:ext>
             </a:extLst>
           </p:cNvPr>
@@ -4854,7 +4854,7 @@
           <p:cNvPr id="12" name="">
             <a:extLst xmlns:a="http://schemas.openxmlformats.org/drawingml/2006/main">
               <a:ext uri="{FF2B5EF4-FFF2-40B4-BE49-F238E27FC236}">
-                <a16:creationId xmlns:a16="http://schemas.microsoft.com/office/drawing/2014/main" id="{6055D4DC-D271-4E95-85EF-5BBA6022E442}"/>
+                <a16:creationId xmlns:a16="http://schemas.microsoft.com/office/drawing/2014/main" id="{4FB19A95-0BC2-4A26-A3C6-27700EA21BCA}"/>
               </a:ext>
             </a:extLst>
           </p:cNvPr>
@@ -4911,7 +4911,7 @@
           <p:cNvPr id="13" name="">
             <a:extLst xmlns:a="http://schemas.openxmlformats.org/drawingml/2006/main">
               <a:ext uri="{FF2B5EF4-FFF2-40B4-BE49-F238E27FC236}">
-                <a16:creationId xmlns:a16="http://schemas.microsoft.com/office/drawing/2014/main" id="{022501B1-1375-41B4-9092-444B3307826C}"/>
+                <a16:creationId xmlns:a16="http://schemas.microsoft.com/office/drawing/2014/main" id="{9F8648AF-2F7E-4018-9397-A6B066588417}"/>
               </a:ext>
             </a:extLst>
           </p:cNvPr>
@@ -4968,7 +4968,7 @@
           <p:cNvPr id="14" name="">
             <a:extLst xmlns:a="http://schemas.openxmlformats.org/drawingml/2006/main">
               <a:ext uri="{FF2B5EF4-FFF2-40B4-BE49-F238E27FC236}">
-                <a16:creationId xmlns:a16="http://schemas.microsoft.com/office/drawing/2014/main" id="{A9758B8B-3652-421D-9AD8-682FB531A9F4}"/>
+                <a16:creationId xmlns:a16="http://schemas.microsoft.com/office/drawing/2014/main" id="{6B8DA445-B3D7-4638-860B-043EC666D267}"/>
               </a:ext>
             </a:extLst>
           </p:cNvPr>
@@ -5002,7 +5002,7 @@
           <p:cNvPr id="15" name="">
             <a:extLst xmlns:a="http://schemas.openxmlformats.org/drawingml/2006/main">
               <a:ext uri="{FF2B5EF4-FFF2-40B4-BE49-F238E27FC236}">
-                <a16:creationId xmlns:a16="http://schemas.microsoft.com/office/drawing/2014/main" id="{D8950CD6-17AA-4748-84DB-8139097B47E0}"/>
+                <a16:creationId xmlns:a16="http://schemas.microsoft.com/office/drawing/2014/main" id="{55370E73-5F2C-4002-BD92-807E5C1EC338}"/>
               </a:ext>
             </a:extLst>
           </p:cNvPr>
@@ -5034,7 +5034,7 @@
           <p:cNvPr id="16" name="">
             <a:extLst xmlns:a="http://schemas.openxmlformats.org/drawingml/2006/main">
               <a:ext uri="{FF2B5EF4-FFF2-40B4-BE49-F238E27FC236}">
-                <a16:creationId xmlns:a16="http://schemas.microsoft.com/office/drawing/2014/main" id="{2DB8F3CE-C08B-4D33-9213-4DE0E984CC24}"/>
+                <a16:creationId xmlns:a16="http://schemas.microsoft.com/office/drawing/2014/main" id="{7C4D1893-EB3C-4080-B173-4EA40DF83D7E}"/>
               </a:ext>
             </a:extLst>
           </p:cNvPr>
@@ -5091,7 +5091,7 @@
           <p:cNvPr id="17" name="">
             <a:extLst xmlns:a="http://schemas.openxmlformats.org/drawingml/2006/main">
               <a:ext uri="{FF2B5EF4-FFF2-40B4-BE49-F238E27FC236}">
-                <a16:creationId xmlns:a16="http://schemas.microsoft.com/office/drawing/2014/main" id="{7CC17AEE-E8BF-4427-9816-16E97B12EDA5}"/>
+                <a16:creationId xmlns:a16="http://schemas.microsoft.com/office/drawing/2014/main" id="{1A9A6BDB-45D0-4FB9-A4E8-DA05D9180951}"/>
               </a:ext>
             </a:extLst>
           </p:cNvPr>
@@ -5148,7 +5148,7 @@
           <p:cNvPr id="18" name="">
             <a:extLst xmlns:a="http://schemas.openxmlformats.org/drawingml/2006/main">
               <a:ext uri="{FF2B5EF4-FFF2-40B4-BE49-F238E27FC236}">
-                <a16:creationId xmlns:a16="http://schemas.microsoft.com/office/drawing/2014/main" id="{FE12D1D2-906B-4F98-91E3-901A4334F611}"/>
+                <a16:creationId xmlns:a16="http://schemas.microsoft.com/office/drawing/2014/main" id="{3873A59C-2B44-41CE-BF35-778A55E543F1}"/>
               </a:ext>
             </a:extLst>
           </p:cNvPr>
@@ -5182,7 +5182,7 @@
           <p:cNvPr id="19" name="">
             <a:extLst xmlns:a="http://schemas.openxmlformats.org/drawingml/2006/main">
               <a:ext uri="{FF2B5EF4-FFF2-40B4-BE49-F238E27FC236}">
-                <a16:creationId xmlns:a16="http://schemas.microsoft.com/office/drawing/2014/main" id="{45E032F6-62FF-4C37-8D37-263500C599EE}"/>
+                <a16:creationId xmlns:a16="http://schemas.microsoft.com/office/drawing/2014/main" id="{BB8B272D-FAB5-4F22-82BF-E443006C9B89}"/>
               </a:ext>
             </a:extLst>
           </p:cNvPr>
@@ -5214,7 +5214,7 @@
           <p:cNvPr id="20" name="">
             <a:extLst xmlns:a="http://schemas.openxmlformats.org/drawingml/2006/main">
               <a:ext uri="{FF2B5EF4-FFF2-40B4-BE49-F238E27FC236}">
-                <a16:creationId xmlns:a16="http://schemas.microsoft.com/office/drawing/2014/main" id="{65DF4AE1-E4C7-4334-BCD1-1584C2209209}"/>
+                <a16:creationId xmlns:a16="http://schemas.microsoft.com/office/drawing/2014/main" id="{EC5EECB2-AA1A-4497-878C-3EE9F7363021}"/>
               </a:ext>
             </a:extLst>
           </p:cNvPr>
@@ -5271,7 +5271,7 @@
           <p:cNvPr id="21" name="">
             <a:extLst xmlns:a="http://schemas.openxmlformats.org/drawingml/2006/main">
               <a:ext uri="{FF2B5EF4-FFF2-40B4-BE49-F238E27FC236}">
-                <a16:creationId xmlns:a16="http://schemas.microsoft.com/office/drawing/2014/main" id="{4F174495-E855-4CCD-B956-1C2732012EE4}"/>
+                <a16:creationId xmlns:a16="http://schemas.microsoft.com/office/drawing/2014/main" id="{0753CB62-AFE2-49C4-9175-FCEFA2C135EE}"/>
               </a:ext>
             </a:extLst>
           </p:cNvPr>
@@ -5328,7 +5328,7 @@
           <p:cNvPr id="22" name="">
             <a:extLst xmlns:a="http://schemas.openxmlformats.org/drawingml/2006/main">
               <a:ext uri="{FF2B5EF4-FFF2-40B4-BE49-F238E27FC236}">
-                <a16:creationId xmlns:a16="http://schemas.microsoft.com/office/drawing/2014/main" id="{5F136305-1638-45FB-BFCF-35F3ADB5B708}"/>
+                <a16:creationId xmlns:a16="http://schemas.microsoft.com/office/drawing/2014/main" id="{508C8BA9-71DF-461E-9FDC-D6768C80906D}"/>
               </a:ext>
             </a:extLst>
           </p:cNvPr>
@@ -5383,7 +5383,7 @@
     </p:spTree>
     <p:extLst>
       <p:ext uri="{BB962C8B-B14F-4D97-AF65-F5344CB8AC3E}">
-        <p14:creationId xmlns:p14="http://schemas.microsoft.com/office/powerpoint/2010/main" val="114017884"/>
+        <p14:creationId xmlns:p14="http://schemas.microsoft.com/office/powerpoint/2010/main" val="546412080"/>
       </p:ext>
     </p:extLst>
   </p:cSld>
@@ -5584,7 +5584,7 @@
           <p:cNvPr id="23" name="">
             <a:extLst xmlns:a="http://schemas.openxmlformats.org/drawingml/2006/main">
               <a:ext uri="{FF2B5EF4-FFF2-40B4-BE49-F238E27FC236}">
-                <a16:creationId xmlns:a16="http://schemas.microsoft.com/office/drawing/2014/main" id="{133D32AA-BFE5-43AC-849F-22CEE3FC0BEA}"/>
+                <a16:creationId xmlns:a16="http://schemas.microsoft.com/office/drawing/2014/main" id="{662DBBDF-99CF-4B8C-912C-B572C17F5495}"/>
               </a:ext>
             </a:extLst>
           </p:cNvPr>
@@ -5616,7 +5616,7 @@
           <p:cNvPr id="2" name="">
             <a:extLst xmlns:a="http://schemas.openxmlformats.org/drawingml/2006/main">
               <a:ext uri="{FF2B5EF4-FFF2-40B4-BE49-F238E27FC236}">
-                <a16:creationId xmlns:a16="http://schemas.microsoft.com/office/drawing/2014/main" id="{532F4161-D334-4FEB-B5F1-7AA6E1EB8CC0}"/>
+                <a16:creationId xmlns:a16="http://schemas.microsoft.com/office/drawing/2014/main" id="{DAB4274A-6173-4C8E-966B-450EB3DC8356}"/>
               </a:ext>
             </a:extLst>
           </p:cNvPr>
@@ -5673,7 +5673,7 @@
           <p:cNvPr id="3" name="">
             <a:extLst xmlns:a="http://schemas.openxmlformats.org/drawingml/2006/main">
               <a:ext uri="{FF2B5EF4-FFF2-40B4-BE49-F238E27FC236}">
-                <a16:creationId xmlns:a16="http://schemas.microsoft.com/office/drawing/2014/main" id="{308995B4-DC7B-4FC8-9458-EA4C11AE73B7}"/>
+                <a16:creationId xmlns:a16="http://schemas.microsoft.com/office/drawing/2014/main" id="{17E3B366-E115-47B1-8550-CCA6146B2003}"/>
               </a:ext>
             </a:extLst>
           </p:cNvPr>
@@ -5705,7 +5705,7 @@
           <p:cNvPr id="4" name="">
             <a:extLst xmlns:a="http://schemas.openxmlformats.org/drawingml/2006/main">
               <a:ext uri="{FF2B5EF4-FFF2-40B4-BE49-F238E27FC236}">
-                <a16:creationId xmlns:a16="http://schemas.microsoft.com/office/drawing/2014/main" id="{93A72DE6-6D49-470E-BBEF-78B668818F53}"/>
+                <a16:creationId xmlns:a16="http://schemas.microsoft.com/office/drawing/2014/main" id="{DFB537E1-61C7-496F-A40D-0C386ABF0BB7}"/>
               </a:ext>
             </a:extLst>
           </p:cNvPr>
@@ -5762,7 +5762,7 @@
           <p:cNvPr id="5" name="">
             <a:extLst xmlns:a="http://schemas.openxmlformats.org/drawingml/2006/main">
               <a:ext uri="{FF2B5EF4-FFF2-40B4-BE49-F238E27FC236}">
-                <a16:creationId xmlns:a16="http://schemas.microsoft.com/office/drawing/2014/main" id="{648F14FC-9770-42E6-BF69-D6DBC2B58580}"/>
+                <a16:creationId xmlns:a16="http://schemas.microsoft.com/office/drawing/2014/main" id="{C404B981-FCE4-4303-9DB0-BA4C95EF1AF7}"/>
               </a:ext>
             </a:extLst>
           </p:cNvPr>
@@ -5819,7 +5819,7 @@
           <p:cNvPr id="6" name="">
             <a:extLst xmlns:a="http://schemas.openxmlformats.org/drawingml/2006/main">
               <a:ext uri="{FF2B5EF4-FFF2-40B4-BE49-F238E27FC236}">
-                <a16:creationId xmlns:a16="http://schemas.microsoft.com/office/drawing/2014/main" id="{95A7865B-7A20-4BCB-B916-2273E9E4F56E}"/>
+                <a16:creationId xmlns:a16="http://schemas.microsoft.com/office/drawing/2014/main" id="{269855B5-A2B7-4D72-824B-A5FDF17BC340}"/>
               </a:ext>
             </a:extLst>
           </p:cNvPr>
@@ -5876,7 +5876,7 @@
           <p:cNvPr id="7" name="">
             <a:extLst xmlns:a="http://schemas.openxmlformats.org/drawingml/2006/main">
               <a:ext uri="{FF2B5EF4-FFF2-40B4-BE49-F238E27FC236}">
-                <a16:creationId xmlns:a16="http://schemas.microsoft.com/office/drawing/2014/main" id="{84376591-BC9E-4F48-9BDE-B9ACFB16CA82}"/>
+                <a16:creationId xmlns:a16="http://schemas.microsoft.com/office/drawing/2014/main" id="{2603B9C7-8C50-4B1B-BD84-088D94ADA532}"/>
               </a:ext>
             </a:extLst>
           </p:cNvPr>
@@ -5908,7 +5908,7 @@
           <p:cNvPr id="8" name="">
             <a:extLst xmlns:a="http://schemas.openxmlformats.org/drawingml/2006/main">
               <a:ext uri="{FF2B5EF4-FFF2-40B4-BE49-F238E27FC236}">
-                <a16:creationId xmlns:a16="http://schemas.microsoft.com/office/drawing/2014/main" id="{F950FA87-E873-4B95-967D-14AB30F2A301}"/>
+                <a16:creationId xmlns:a16="http://schemas.microsoft.com/office/drawing/2014/main" id="{78685A15-40D6-4CC6-9342-422D98C735E2}"/>
               </a:ext>
             </a:extLst>
           </p:cNvPr>
@@ -5965,7 +5965,7 @@
           <p:cNvPr id="9" name="">
             <a:extLst xmlns:a="http://schemas.openxmlformats.org/drawingml/2006/main">
               <a:ext uri="{FF2B5EF4-FFF2-40B4-BE49-F238E27FC236}">
-                <a16:creationId xmlns:a16="http://schemas.microsoft.com/office/drawing/2014/main" id="{379DB36C-C295-4D5E-87DB-606A4DD6BD9A}"/>
+                <a16:creationId xmlns:a16="http://schemas.microsoft.com/office/drawing/2014/main" id="{1A9C372C-EBE0-410F-BA71-50705339C5B0}"/>
               </a:ext>
             </a:extLst>
           </p:cNvPr>
@@ -6022,7 +6022,7 @@
           <p:cNvPr id="10" name="">
             <a:extLst xmlns:a="http://schemas.openxmlformats.org/drawingml/2006/main">
               <a:ext uri="{FF2B5EF4-FFF2-40B4-BE49-F238E27FC236}">
-                <a16:creationId xmlns:a16="http://schemas.microsoft.com/office/drawing/2014/main" id="{16081CA0-F782-4B09-A9A0-2BC4C13FBA26}"/>
+                <a16:creationId xmlns:a16="http://schemas.microsoft.com/office/drawing/2014/main" id="{E70D5DEC-DB4A-4A90-93D1-CFF20F97FBA3}"/>
               </a:ext>
             </a:extLst>
           </p:cNvPr>
@@ -6056,7 +6056,7 @@
           <p:cNvPr id="11" name="">
             <a:extLst xmlns:a="http://schemas.openxmlformats.org/drawingml/2006/main">
               <a:ext uri="{FF2B5EF4-FFF2-40B4-BE49-F238E27FC236}">
-                <a16:creationId xmlns:a16="http://schemas.microsoft.com/office/drawing/2014/main" id="{D5456BB9-3EA5-44C3-A28F-A949A1DC30FD}"/>
+                <a16:creationId xmlns:a16="http://schemas.microsoft.com/office/drawing/2014/main" id="{2AA3D327-216C-4642-B0A2-016924BFAB9B}"/>
               </a:ext>
             </a:extLst>
           </p:cNvPr>
@@ -6088,7 +6088,7 @@
           <p:cNvPr id="12" name="">
             <a:extLst xmlns:a="http://schemas.openxmlformats.org/drawingml/2006/main">
               <a:ext uri="{FF2B5EF4-FFF2-40B4-BE49-F238E27FC236}">
-                <a16:creationId xmlns:a16="http://schemas.microsoft.com/office/drawing/2014/main" id="{E7783274-7F0E-4E44-9568-834B50297AAA}"/>
+                <a16:creationId xmlns:a16="http://schemas.microsoft.com/office/drawing/2014/main" id="{2CD740B3-ED49-4EB0-8477-0BF6CED7FDA3}"/>
               </a:ext>
             </a:extLst>
           </p:cNvPr>
@@ -6145,7 +6145,7 @@
           <p:cNvPr id="13" name="">
             <a:extLst xmlns:a="http://schemas.openxmlformats.org/drawingml/2006/main">
               <a:ext uri="{FF2B5EF4-FFF2-40B4-BE49-F238E27FC236}">
-                <a16:creationId xmlns:a16="http://schemas.microsoft.com/office/drawing/2014/main" id="{A24D308E-E43B-448B-A21E-989F9CDE843A}"/>
+                <a16:creationId xmlns:a16="http://schemas.microsoft.com/office/drawing/2014/main" id="{C3C543D7-E4C8-44EB-8348-D5BFB2DBD9B0}"/>
               </a:ext>
             </a:extLst>
           </p:cNvPr>
@@ -6202,7 +6202,7 @@
           <p:cNvPr id="14" name="">
             <a:extLst xmlns:a="http://schemas.openxmlformats.org/drawingml/2006/main">
               <a:ext uri="{FF2B5EF4-FFF2-40B4-BE49-F238E27FC236}">
-                <a16:creationId xmlns:a16="http://schemas.microsoft.com/office/drawing/2014/main" id="{052B5DF9-CC46-4E31-B798-0F5D380A2483}"/>
+                <a16:creationId xmlns:a16="http://schemas.microsoft.com/office/drawing/2014/main" id="{66DA46FB-064C-41D2-8621-9D20DE4A2993}"/>
               </a:ext>
             </a:extLst>
           </p:cNvPr>
@@ -6236,7 +6236,7 @@
           <p:cNvPr id="15" name="">
             <a:extLst xmlns:a="http://schemas.openxmlformats.org/drawingml/2006/main">
               <a:ext uri="{FF2B5EF4-FFF2-40B4-BE49-F238E27FC236}">
-                <a16:creationId xmlns:a16="http://schemas.microsoft.com/office/drawing/2014/main" id="{3FEA35C1-38A2-4A97-A001-59FAD10A6ABB}"/>
+                <a16:creationId xmlns:a16="http://schemas.microsoft.com/office/drawing/2014/main" id="{F6D17938-0256-444C-82BA-8DBF53A68B37}"/>
               </a:ext>
             </a:extLst>
           </p:cNvPr>
@@ -6268,7 +6268,7 @@
           <p:cNvPr id="16" name="">
             <a:extLst xmlns:a="http://schemas.openxmlformats.org/drawingml/2006/main">
               <a:ext uri="{FF2B5EF4-FFF2-40B4-BE49-F238E27FC236}">
-                <a16:creationId xmlns:a16="http://schemas.microsoft.com/office/drawing/2014/main" id="{29679DB3-00F0-4C49-A858-BDD5EE95174F}"/>
+                <a16:creationId xmlns:a16="http://schemas.microsoft.com/office/drawing/2014/main" id="{CF1DB76E-032F-437A-A417-DB65A7060B4E}"/>
               </a:ext>
             </a:extLst>
           </p:cNvPr>
@@ -6325,7 +6325,7 @@
           <p:cNvPr id="17" name="">
             <a:extLst xmlns:a="http://schemas.openxmlformats.org/drawingml/2006/main">
               <a:ext uri="{FF2B5EF4-FFF2-40B4-BE49-F238E27FC236}">
-                <a16:creationId xmlns:a16="http://schemas.microsoft.com/office/drawing/2014/main" id="{BA5CA3F6-36CF-4BB8-A65A-58B03901E653}"/>
+                <a16:creationId xmlns:a16="http://schemas.microsoft.com/office/drawing/2014/main" id="{41521C9D-05D2-4785-9019-06BE61F80C34}"/>
               </a:ext>
             </a:extLst>
           </p:cNvPr>
@@ -6382,7 +6382,7 @@
           <p:cNvPr id="18" name="">
             <a:extLst xmlns:a="http://schemas.openxmlformats.org/drawingml/2006/main">
               <a:ext uri="{FF2B5EF4-FFF2-40B4-BE49-F238E27FC236}">
-                <a16:creationId xmlns:a16="http://schemas.microsoft.com/office/drawing/2014/main" id="{3679A276-A034-4EC0-AD18-9292325D9BFC}"/>
+                <a16:creationId xmlns:a16="http://schemas.microsoft.com/office/drawing/2014/main" id="{9BD75326-5A01-455B-A0FD-35A8A8F99B64}"/>
               </a:ext>
             </a:extLst>
           </p:cNvPr>
@@ -6416,7 +6416,7 @@
           <p:cNvPr id="19" name="">
             <a:extLst xmlns:a="http://schemas.openxmlformats.org/drawingml/2006/main">
               <a:ext uri="{FF2B5EF4-FFF2-40B4-BE49-F238E27FC236}">
-                <a16:creationId xmlns:a16="http://schemas.microsoft.com/office/drawing/2014/main" id="{7CCAD863-BDD9-4C13-B342-40F5BF409997}"/>
+                <a16:creationId xmlns:a16="http://schemas.microsoft.com/office/drawing/2014/main" id="{5FEFA027-F0A4-4B80-A394-4C8A057FA49B}"/>
               </a:ext>
             </a:extLst>
           </p:cNvPr>
@@ -6448,7 +6448,7 @@
           <p:cNvPr id="20" name="">
             <a:extLst xmlns:a="http://schemas.openxmlformats.org/drawingml/2006/main">
               <a:ext uri="{FF2B5EF4-FFF2-40B4-BE49-F238E27FC236}">
-                <a16:creationId xmlns:a16="http://schemas.microsoft.com/office/drawing/2014/main" id="{1E115470-4B5E-4320-B5D5-BE2562CC73E3}"/>
+                <a16:creationId xmlns:a16="http://schemas.microsoft.com/office/drawing/2014/main" id="{0ECDD962-5711-467C-8953-DAB5E67813BA}"/>
               </a:ext>
             </a:extLst>
           </p:cNvPr>
@@ -6505,7 +6505,7 @@
           <p:cNvPr id="21" name="">
             <a:extLst xmlns:a="http://schemas.openxmlformats.org/drawingml/2006/main">
               <a:ext uri="{FF2B5EF4-FFF2-40B4-BE49-F238E27FC236}">
-                <a16:creationId xmlns:a16="http://schemas.microsoft.com/office/drawing/2014/main" id="{2DF98835-95C5-4494-A9F6-F17526D63156}"/>
+                <a16:creationId xmlns:a16="http://schemas.microsoft.com/office/drawing/2014/main" id="{E127C371-B7F6-45C0-9119-EFCF96A7EFFE}"/>
               </a:ext>
             </a:extLst>
           </p:cNvPr>
@@ -6562,7 +6562,7 @@
           <p:cNvPr id="22" name="">
             <a:extLst xmlns:a="http://schemas.openxmlformats.org/drawingml/2006/main">
               <a:ext uri="{FF2B5EF4-FFF2-40B4-BE49-F238E27FC236}">
-                <a16:creationId xmlns:a16="http://schemas.microsoft.com/office/drawing/2014/main" id="{C6E73B1B-04A6-47F7-9DA8-DCF2D9D780A8}"/>
+                <a16:creationId xmlns:a16="http://schemas.microsoft.com/office/drawing/2014/main" id="{94F9395A-5F96-4C5B-A8E4-0019AED32193}"/>
               </a:ext>
             </a:extLst>
           </p:cNvPr>
@@ -6617,7 +6617,7 @@
     </p:spTree>
     <p:extLst>
       <p:ext uri="{BB962C8B-B14F-4D97-AF65-F5344CB8AC3E}">
-        <p14:creationId xmlns:p14="http://schemas.microsoft.com/office/powerpoint/2010/main" val="1581953499"/>
+        <p14:creationId xmlns:p14="http://schemas.microsoft.com/office/powerpoint/2010/main" val="685696728"/>
       </p:ext>
     </p:extLst>
   </p:cSld>
@@ -6818,7 +6818,7 @@
           <p:cNvPr id="16" name="">
             <a:extLst xmlns:a="http://schemas.openxmlformats.org/drawingml/2006/main">
               <a:ext uri="{FF2B5EF4-FFF2-40B4-BE49-F238E27FC236}">
-                <a16:creationId xmlns:a16="http://schemas.microsoft.com/office/drawing/2014/main" id="{0C4CC0C9-CD12-4365-9D3E-5EB3EFA5CA25}"/>
+                <a16:creationId xmlns:a16="http://schemas.microsoft.com/office/drawing/2014/main" id="{E48910B5-517F-429E-885B-DA7E3C9B4D7C}"/>
               </a:ext>
             </a:extLst>
           </p:cNvPr>
@@ -6850,7 +6850,7 @@
           <p:cNvPr id="2" name="">
             <a:extLst xmlns:a="http://schemas.openxmlformats.org/drawingml/2006/main">
               <a:ext uri="{FF2B5EF4-FFF2-40B4-BE49-F238E27FC236}">
-                <a16:creationId xmlns:a16="http://schemas.microsoft.com/office/drawing/2014/main" id="{38CF61FD-B6C7-41D6-89C0-838E39AB662A}"/>
+                <a16:creationId xmlns:a16="http://schemas.microsoft.com/office/drawing/2014/main" id="{A0DFD75C-86B3-42FF-BDD6-C658338AB35E}"/>
               </a:ext>
             </a:extLst>
           </p:cNvPr>
@@ -6907,7 +6907,7 @@
           <p:cNvPr id="3" name="">
             <a:extLst xmlns:a="http://schemas.openxmlformats.org/drawingml/2006/main">
               <a:ext uri="{FF2B5EF4-FFF2-40B4-BE49-F238E27FC236}">
-                <a16:creationId xmlns:a16="http://schemas.microsoft.com/office/drawing/2014/main" id="{9B6588DA-5945-4BA4-9A57-70F9B5962EAD}"/>
+                <a16:creationId xmlns:a16="http://schemas.microsoft.com/office/drawing/2014/main" id="{06594CC1-4B91-45D4-BAD1-25F6FEDA1CC2}"/>
               </a:ext>
             </a:extLst>
           </p:cNvPr>
@@ -6939,7 +6939,7 @@
           <p:cNvPr id="4" name="">
             <a:extLst xmlns:a="http://schemas.openxmlformats.org/drawingml/2006/main">
               <a:ext uri="{FF2B5EF4-FFF2-40B4-BE49-F238E27FC236}">
-                <a16:creationId xmlns:a16="http://schemas.microsoft.com/office/drawing/2014/main" id="{7CC459A0-4647-4064-A4C8-CECA743199DC}"/>
+                <a16:creationId xmlns:a16="http://schemas.microsoft.com/office/drawing/2014/main" id="{66EA3C95-82FB-414F-9F6F-0432BF1FADD9}"/>
               </a:ext>
             </a:extLst>
           </p:cNvPr>
@@ -6996,7 +6996,7 @@
           <p:cNvPr id="5" name="">
             <a:extLst xmlns:a="http://schemas.openxmlformats.org/drawingml/2006/main">
               <a:ext uri="{FF2B5EF4-FFF2-40B4-BE49-F238E27FC236}">
-                <a16:creationId xmlns:a16="http://schemas.microsoft.com/office/drawing/2014/main" id="{9EA09068-0C14-47A0-89BB-36E0108E392A}"/>
+                <a16:creationId xmlns:a16="http://schemas.microsoft.com/office/drawing/2014/main" id="{03C08FD7-EB9E-45A9-87E3-FA89417B10B8}"/>
               </a:ext>
             </a:extLst>
           </p:cNvPr>
@@ -7053,7 +7053,7 @@
           <p:cNvPr id="6" name="">
             <a:extLst xmlns:a="http://schemas.openxmlformats.org/drawingml/2006/main">
               <a:ext uri="{FF2B5EF4-FFF2-40B4-BE49-F238E27FC236}">
-                <a16:creationId xmlns:a16="http://schemas.microsoft.com/office/drawing/2014/main" id="{8B13F285-712E-4538-8958-05025E93648F}"/>
+                <a16:creationId xmlns:a16="http://schemas.microsoft.com/office/drawing/2014/main" id="{C12939EA-E83B-4187-9DD2-0B7E29371E95}"/>
               </a:ext>
             </a:extLst>
           </p:cNvPr>
@@ -7110,7 +7110,7 @@
           <p:cNvPr id="7" name="">
             <a:extLst xmlns:a="http://schemas.openxmlformats.org/drawingml/2006/main">
               <a:ext uri="{FF2B5EF4-FFF2-40B4-BE49-F238E27FC236}">
-                <a16:creationId xmlns:a16="http://schemas.microsoft.com/office/drawing/2014/main" id="{9FBD799F-0AFC-4827-A0F9-B1730D2FF12B}"/>
+                <a16:creationId xmlns:a16="http://schemas.microsoft.com/office/drawing/2014/main" id="{C9248599-0C71-419D-A160-46E3848342D9}"/>
               </a:ext>
             </a:extLst>
           </p:cNvPr>
@@ -7142,7 +7142,7 @@
           <p:cNvPr id="8" name="">
             <a:extLst xmlns:a="http://schemas.openxmlformats.org/drawingml/2006/main">
               <a:ext uri="{FF2B5EF4-FFF2-40B4-BE49-F238E27FC236}">
-                <a16:creationId xmlns:a16="http://schemas.microsoft.com/office/drawing/2014/main" id="{C4261CD7-B3E3-4C26-B5BF-115618138227}"/>
+                <a16:creationId xmlns:a16="http://schemas.microsoft.com/office/drawing/2014/main" id="{39FBC445-9C26-43C6-91BF-F1CF06BAE65C}"/>
               </a:ext>
             </a:extLst>
           </p:cNvPr>
@@ -7199,7 +7199,7 @@
           <p:cNvPr id="9" name="">
             <a:extLst xmlns:a="http://schemas.openxmlformats.org/drawingml/2006/main">
               <a:ext uri="{FF2B5EF4-FFF2-40B4-BE49-F238E27FC236}">
-                <a16:creationId xmlns:a16="http://schemas.microsoft.com/office/drawing/2014/main" id="{D2DB9AB6-48A8-45F9-8D04-16527DCC617F}"/>
+                <a16:creationId xmlns:a16="http://schemas.microsoft.com/office/drawing/2014/main" id="{83ABDEEF-76DA-43E7-A79D-EA18B8154113}"/>
               </a:ext>
             </a:extLst>
           </p:cNvPr>
@@ -7256,7 +7256,7 @@
           <p:cNvPr id="10" name="">
             <a:extLst xmlns:a="http://schemas.openxmlformats.org/drawingml/2006/main">
               <a:ext uri="{FF2B5EF4-FFF2-40B4-BE49-F238E27FC236}">
-                <a16:creationId xmlns:a16="http://schemas.microsoft.com/office/drawing/2014/main" id="{76869971-55FB-4482-9C41-FCB21C34CC61}"/>
+                <a16:creationId xmlns:a16="http://schemas.microsoft.com/office/drawing/2014/main" id="{1EC005C6-6B6D-494C-B1FD-67E6F2D6A1A5}"/>
               </a:ext>
             </a:extLst>
           </p:cNvPr>
@@ -7313,7 +7313,7 @@
           <p:cNvPr id="11" name="">
             <a:extLst xmlns:a="http://schemas.openxmlformats.org/drawingml/2006/main">
               <a:ext uri="{FF2B5EF4-FFF2-40B4-BE49-F238E27FC236}">
-                <a16:creationId xmlns:a16="http://schemas.microsoft.com/office/drawing/2014/main" id="{4A86C9E0-1E1F-498D-9852-F67EA9F12CD6}"/>
+                <a16:creationId xmlns:a16="http://schemas.microsoft.com/office/drawing/2014/main" id="{86D71D15-4D32-43B2-84A2-EBBEF53F693A}"/>
               </a:ext>
             </a:extLst>
           </p:cNvPr>
@@ -7345,7 +7345,7 @@
           <p:cNvPr id="12" name="">
             <a:extLst xmlns:a="http://schemas.openxmlformats.org/drawingml/2006/main">
               <a:ext uri="{FF2B5EF4-FFF2-40B4-BE49-F238E27FC236}">
-                <a16:creationId xmlns:a16="http://schemas.microsoft.com/office/drawing/2014/main" id="{347358CA-8966-41A2-8C9B-C535497DE76B}"/>
+                <a16:creationId xmlns:a16="http://schemas.microsoft.com/office/drawing/2014/main" id="{23B315FB-C8CB-4AB0-A993-599B00349CED}"/>
               </a:ext>
             </a:extLst>
           </p:cNvPr>
@@ -7402,7 +7402,7 @@
           <p:cNvPr id="13" name="">
             <a:extLst xmlns:a="http://schemas.openxmlformats.org/drawingml/2006/main">
               <a:ext uri="{FF2B5EF4-FFF2-40B4-BE49-F238E27FC236}">
-                <a16:creationId xmlns:a16="http://schemas.microsoft.com/office/drawing/2014/main" id="{389CEBBF-5F4B-40EE-82C7-FA970B621A09}"/>
+                <a16:creationId xmlns:a16="http://schemas.microsoft.com/office/drawing/2014/main" id="{17C3DA42-25F0-4291-823D-E4D7002FB606}"/>
               </a:ext>
             </a:extLst>
           </p:cNvPr>
@@ -7459,7 +7459,7 @@
           <p:cNvPr id="14" name="">
             <a:extLst xmlns:a="http://schemas.openxmlformats.org/drawingml/2006/main">
               <a:ext uri="{FF2B5EF4-FFF2-40B4-BE49-F238E27FC236}">
-                <a16:creationId xmlns:a16="http://schemas.microsoft.com/office/drawing/2014/main" id="{6F04200C-84A0-4B77-A37A-3C3162DA1407}"/>
+                <a16:creationId xmlns:a16="http://schemas.microsoft.com/office/drawing/2014/main" id="{D8AC77AA-70D1-4670-9B92-C49E33D9A2FB}"/>
               </a:ext>
             </a:extLst>
           </p:cNvPr>
@@ -7516,7 +7516,7 @@
           <p:cNvPr id="15" name="">
             <a:extLst xmlns:a="http://schemas.openxmlformats.org/drawingml/2006/main">
               <a:ext uri="{FF2B5EF4-FFF2-40B4-BE49-F238E27FC236}">
-                <a16:creationId xmlns:a16="http://schemas.microsoft.com/office/drawing/2014/main" id="{25A53668-9CA2-46CA-BC95-BACCF0BF06C0}"/>
+                <a16:creationId xmlns:a16="http://schemas.microsoft.com/office/drawing/2014/main" id="{3AD7ABDE-AA4A-45BC-AF02-8C92F2DE81E3}"/>
               </a:ext>
             </a:extLst>
           </p:cNvPr>
@@ -7571,7 +7571,7 @@
     </p:spTree>
     <p:extLst>
       <p:ext uri="{BB962C8B-B14F-4D97-AF65-F5344CB8AC3E}">
-        <p14:creationId xmlns:p14="http://schemas.microsoft.com/office/powerpoint/2010/main" val="1669819482"/>
+        <p14:creationId xmlns:p14="http://schemas.microsoft.com/office/powerpoint/2010/main" val="863880026"/>
       </p:ext>
     </p:extLst>
   </p:cSld>
@@ -7772,7 +7772,7 @@
           <p:cNvPr id="23" name="">
             <a:extLst xmlns:a="http://schemas.openxmlformats.org/drawingml/2006/main">
               <a:ext uri="{FF2B5EF4-FFF2-40B4-BE49-F238E27FC236}">
-                <a16:creationId xmlns:a16="http://schemas.microsoft.com/office/drawing/2014/main" id="{EB88507D-F9AA-4DF5-A607-58B9A5285DE4}"/>
+                <a16:creationId xmlns:a16="http://schemas.microsoft.com/office/drawing/2014/main" id="{C3E701C2-9DF5-447C-AD7B-AADC2A18720F}"/>
               </a:ext>
             </a:extLst>
           </p:cNvPr>
@@ -7804,7 +7804,7 @@
           <p:cNvPr id="2" name="">
             <a:extLst xmlns:a="http://schemas.openxmlformats.org/drawingml/2006/main">
               <a:ext uri="{FF2B5EF4-FFF2-40B4-BE49-F238E27FC236}">
-                <a16:creationId xmlns:a16="http://schemas.microsoft.com/office/drawing/2014/main" id="{7F3CBF0E-68D1-426C-93C7-5AB70D7470D5}"/>
+                <a16:creationId xmlns:a16="http://schemas.microsoft.com/office/drawing/2014/main" id="{961522EE-B37C-4F58-9A05-4D55879D9EE6}"/>
               </a:ext>
             </a:extLst>
           </p:cNvPr>
@@ -7861,7 +7861,7 @@
           <p:cNvPr id="3" name="">
             <a:extLst xmlns:a="http://schemas.openxmlformats.org/drawingml/2006/main">
               <a:ext uri="{FF2B5EF4-FFF2-40B4-BE49-F238E27FC236}">
-                <a16:creationId xmlns:a16="http://schemas.microsoft.com/office/drawing/2014/main" id="{16B943DE-432E-4BD4-B167-E700A34C1C58}"/>
+                <a16:creationId xmlns:a16="http://schemas.microsoft.com/office/drawing/2014/main" id="{5A69B528-3FB9-4602-A335-EA40A493E539}"/>
               </a:ext>
             </a:extLst>
           </p:cNvPr>
@@ -7893,7 +7893,7 @@
           <p:cNvPr id="4" name="">
             <a:extLst xmlns:a="http://schemas.openxmlformats.org/drawingml/2006/main">
               <a:ext uri="{FF2B5EF4-FFF2-40B4-BE49-F238E27FC236}">
-                <a16:creationId xmlns:a16="http://schemas.microsoft.com/office/drawing/2014/main" id="{C6C32CFD-6D00-4B39-B378-336DF37F6DBE}"/>
+                <a16:creationId xmlns:a16="http://schemas.microsoft.com/office/drawing/2014/main" id="{F1C43F9D-A569-4C50-9E2C-9FD519507597}"/>
               </a:ext>
             </a:extLst>
           </p:cNvPr>
@@ -7950,7 +7950,7 @@
           <p:cNvPr id="5" name="">
             <a:extLst xmlns:a="http://schemas.openxmlformats.org/drawingml/2006/main">
               <a:ext uri="{FF2B5EF4-FFF2-40B4-BE49-F238E27FC236}">
-                <a16:creationId xmlns:a16="http://schemas.microsoft.com/office/drawing/2014/main" id="{1DB3D2BD-7353-4B27-B2C1-0870FF57E9D4}"/>
+                <a16:creationId xmlns:a16="http://schemas.microsoft.com/office/drawing/2014/main" id="{D8750955-F062-4A2D-B77E-0758FB4EEDE0}"/>
               </a:ext>
             </a:extLst>
           </p:cNvPr>
@@ -8007,7 +8007,7 @@
           <p:cNvPr id="6" name="">
             <a:extLst xmlns:a="http://schemas.openxmlformats.org/drawingml/2006/main">
               <a:ext uri="{FF2B5EF4-FFF2-40B4-BE49-F238E27FC236}">
-                <a16:creationId xmlns:a16="http://schemas.microsoft.com/office/drawing/2014/main" id="{0B2A3140-D396-4244-A10B-0B35C8B4A2FC}"/>
+                <a16:creationId xmlns:a16="http://schemas.microsoft.com/office/drawing/2014/main" id="{A8475580-6C7D-48FA-8733-4AD35748B967}"/>
               </a:ext>
             </a:extLst>
           </p:cNvPr>
@@ -8064,7 +8064,7 @@
           <p:cNvPr id="7" name="">
             <a:extLst xmlns:a="http://schemas.openxmlformats.org/drawingml/2006/main">
               <a:ext uri="{FF2B5EF4-FFF2-40B4-BE49-F238E27FC236}">
-                <a16:creationId xmlns:a16="http://schemas.microsoft.com/office/drawing/2014/main" id="{CB3B3669-F0B1-4FBB-907E-A605FF950CD9}"/>
+                <a16:creationId xmlns:a16="http://schemas.microsoft.com/office/drawing/2014/main" id="{C2D21CDA-5A38-498D-8BAE-F25EA8378A31}"/>
               </a:ext>
             </a:extLst>
           </p:cNvPr>
@@ -8096,7 +8096,7 @@
           <p:cNvPr id="8" name="">
             <a:extLst xmlns:a="http://schemas.openxmlformats.org/drawingml/2006/main">
               <a:ext uri="{FF2B5EF4-FFF2-40B4-BE49-F238E27FC236}">
-                <a16:creationId xmlns:a16="http://schemas.microsoft.com/office/drawing/2014/main" id="{4515AC06-365A-46D8-824D-58D3AF0ADA4B}"/>
+                <a16:creationId xmlns:a16="http://schemas.microsoft.com/office/drawing/2014/main" id="{AD6F19AA-C0B4-4918-B51C-3F8F120DA291}"/>
               </a:ext>
             </a:extLst>
           </p:cNvPr>
@@ -8153,7 +8153,7 @@
           <p:cNvPr id="9" name="">
             <a:extLst xmlns:a="http://schemas.openxmlformats.org/drawingml/2006/main">
               <a:ext uri="{FF2B5EF4-FFF2-40B4-BE49-F238E27FC236}">
-                <a16:creationId xmlns:a16="http://schemas.microsoft.com/office/drawing/2014/main" id="{F19D2DD1-3476-4DFE-89C4-C59608C36507}"/>
+                <a16:creationId xmlns:a16="http://schemas.microsoft.com/office/drawing/2014/main" id="{FAF74C82-CC7C-4B33-B5B4-9A487123B842}"/>
               </a:ext>
             </a:extLst>
           </p:cNvPr>
@@ -8210,19 +8210,19 @@
           <p:cNvPr id="10" name="">
             <a:extLst xmlns:a="http://schemas.openxmlformats.org/drawingml/2006/main">
               <a:ext uri="{FF2B5EF4-FFF2-40B4-BE49-F238E27FC236}">
-                <a16:creationId xmlns:a16="http://schemas.microsoft.com/office/drawing/2014/main" id="{47A5990D-5C2E-40A5-9865-99439683E526}"/>
-              </a:ext>
-            </a:extLst>
-          </p:cNvPr>
-          <p:cNvSpPr>
-            <a:spLocks xmlns:a="http://schemas.openxmlformats.org/drawingml/2006/main" noGrp="1"/>
-          </p:cNvSpPr>
-          <p:nvPr/>
-        </p:nvSpPr>
-        <p:spPr>
-          <a:xfrm xmlns:a="http://schemas.openxmlformats.org/drawingml/2006/main">
-            <a:off x="914400" y="1257300"/>
-            <a:ext cx="10363200" cy="781050"/>
+                <a16:creationId xmlns:a16="http://schemas.microsoft.com/office/drawing/2014/main" id="{3C2F55E6-E35B-437F-A19C-99F93540778C}"/>
+              </a:ext>
+            </a:extLst>
+          </p:cNvPr>
+          <p:cNvSpPr>
+            <a:spLocks xmlns:a="http://schemas.openxmlformats.org/drawingml/2006/main" noGrp="1"/>
+          </p:cNvSpPr>
+          <p:nvPr/>
+        </p:nvSpPr>
+        <p:spPr>
+          <a:xfrm xmlns:a="http://schemas.openxmlformats.org/drawingml/2006/main">
+            <a:off x="857250" y="1219200"/>
+            <a:ext cx="10477500" cy="742950"/>
           </a:xfrm>
           <a:prstGeom xmlns:a="http://schemas.openxmlformats.org/drawingml/2006/main" prst="rect">
             <a:avLst/>
@@ -8239,7 +8239,7 @@
           <a:lstStyle xmlns:a="http://schemas.openxmlformats.org/drawingml/2006/main"/>
           <a:p xmlns:a="http://schemas.openxmlformats.org/drawingml/2006/main">
             <a:pPr algn="ctr">
-              <a:defRPr sz="2175" b="1">
+              <a:defRPr sz="2100" b="1">
                 <a:solidFill>
                   <a:srgbClr val="17253A"/>
                 </a:solidFill>
@@ -8249,7 +8249,7 @@
               </a:defRPr>
             </a:pPr>
             <a:r>
-              <a:rPr sz="2175" b="1">
+              <a:rPr sz="2100" b="1">
                 <a:solidFill>
                   <a:srgbClr val="17253A"/>
                 </a:solidFill>
@@ -8267,28 +8267,30 @@
           <p:cNvPr id="11" name="">
             <a:extLst xmlns:a="http://schemas.openxmlformats.org/drawingml/2006/main">
               <a:ext uri="{FF2B5EF4-FFF2-40B4-BE49-F238E27FC236}">
-                <a16:creationId xmlns:a16="http://schemas.microsoft.com/office/drawing/2014/main" id="{ED35EA77-F3D7-45D5-9774-D43FE3B5DEA6}"/>
-              </a:ext>
-            </a:extLst>
-          </p:cNvPr>
-          <p:cNvSpPr>
-            <a:spLocks xmlns:a="http://schemas.openxmlformats.org/drawingml/2006/main" noGrp="1"/>
-          </p:cNvSpPr>
-          <p:nvPr/>
-        </p:nvSpPr>
-        <p:spPr>
-          <a:xfrm xmlns:a="http://schemas.openxmlformats.org/drawingml/2006/main">
-            <a:off x="1000125" y="2247900"/>
-            <a:ext cx="476250" cy="476250"/>
-          </a:xfrm>
-          <a:prstGeom xmlns:a="http://schemas.openxmlformats.org/drawingml/2006/main" prst="ellipse">
+                <a16:creationId xmlns:a16="http://schemas.microsoft.com/office/drawing/2014/main" id="{61D5419C-63D0-42FB-B707-6F9A75D82955}"/>
+              </a:ext>
+            </a:extLst>
+          </p:cNvPr>
+          <p:cNvSpPr>
+            <a:spLocks xmlns:a="http://schemas.openxmlformats.org/drawingml/2006/main" noGrp="1"/>
+          </p:cNvSpPr>
+          <p:nvPr/>
+        </p:nvSpPr>
+        <p:spPr>
+          <a:xfrm xmlns:a="http://schemas.openxmlformats.org/drawingml/2006/main">
+            <a:off x="971550" y="2124075"/>
+            <a:ext cx="38100" cy="3524250"/>
+          </a:xfrm>
+          <a:prstGeom xmlns:a="http://schemas.openxmlformats.org/drawingml/2006/main" prst="rect">
             <a:avLst/>
           </a:prstGeom>
           <a:solidFill xmlns:a="http://schemas.openxmlformats.org/drawingml/2006/main">
-            <a:srgbClr val="18324A"/>
+            <a:srgbClr val="2C6E73"/>
           </a:solidFill>
           <a:ln xmlns:a="http://schemas.openxmlformats.org/drawingml/2006/main" w="0">
-            <a:noFill/>
+            <a:solidFill>
+              <a:srgbClr val="2C6E73"/>
+            </a:solidFill>
           </a:ln>
         </p:spPr>
       </p:sp>
@@ -8297,19 +8299,19 @@
           <p:cNvPr id="12" name="">
             <a:extLst xmlns:a="http://schemas.openxmlformats.org/drawingml/2006/main">
               <a:ext uri="{FF2B5EF4-FFF2-40B4-BE49-F238E27FC236}">
-                <a16:creationId xmlns:a16="http://schemas.microsoft.com/office/drawing/2014/main" id="{1EF5A304-F42D-40D8-A206-17E1491E3833}"/>
-              </a:ext>
-            </a:extLst>
-          </p:cNvPr>
-          <p:cNvSpPr>
-            <a:spLocks xmlns:a="http://schemas.openxmlformats.org/drawingml/2006/main" noGrp="1"/>
-          </p:cNvSpPr>
-          <p:nvPr/>
-        </p:nvSpPr>
-        <p:spPr>
-          <a:xfrm xmlns:a="http://schemas.openxmlformats.org/drawingml/2006/main">
-            <a:off x="1000125" y="2276475"/>
-            <a:ext cx="476250" cy="419100"/>
+                <a16:creationId xmlns:a16="http://schemas.microsoft.com/office/drawing/2014/main" id="{F8796CC9-3F00-43DD-86CE-F590117F4D74}"/>
+              </a:ext>
+            </a:extLst>
+          </p:cNvPr>
+          <p:cNvSpPr>
+            <a:spLocks xmlns:a="http://schemas.openxmlformats.org/drawingml/2006/main" noGrp="1"/>
+          </p:cNvSpPr>
+          <p:nvPr/>
+        </p:nvSpPr>
+        <p:spPr>
+          <a:xfrm xmlns:a="http://schemas.openxmlformats.org/drawingml/2006/main">
+            <a:off x="1162050" y="2200275"/>
+            <a:ext cx="400050" cy="400050"/>
           </a:xfrm>
           <a:prstGeom xmlns:a="http://schemas.openxmlformats.org/drawingml/2006/main" prst="rect">
             <a:avLst/>
@@ -8326,9 +8328,9 @@
           <a:lstStyle xmlns:a="http://schemas.openxmlformats.org/drawingml/2006/main"/>
           <a:p xmlns:a="http://schemas.openxmlformats.org/drawingml/2006/main">
             <a:pPr algn="ctr">
-              <a:defRPr sz="1350" b="1">
-                <a:solidFill>
-                  <a:srgbClr val="FFFFFF"/>
+              <a:defRPr sz="1125" b="1">
+                <a:solidFill>
+                  <a:srgbClr val="2C6E73"/>
                 </a:solidFill>
                 <a:latin typeface="Arial"/>
                 <a:ea typeface="Arial"/>
@@ -8336,9 +8338,9 @@
               </a:defRPr>
             </a:pPr>
             <a:r>
-              <a:rPr sz="1350" b="1">
-                <a:solidFill>
-                  <a:srgbClr val="FFFFFF"/>
+              <a:rPr sz="1125" b="1">
+                <a:solidFill>
+                  <a:srgbClr val="2C6E73"/>
                 </a:solidFill>
                 <a:latin typeface="Arial"/>
                 <a:ea typeface="Arial"/>
@@ -8354,19 +8356,19 @@
           <p:cNvPr id="13" name="">
             <a:extLst xmlns:a="http://schemas.openxmlformats.org/drawingml/2006/main">
               <a:ext uri="{FF2B5EF4-FFF2-40B4-BE49-F238E27FC236}">
-                <a16:creationId xmlns:a16="http://schemas.microsoft.com/office/drawing/2014/main" id="{37C31F1B-BDEF-4253-BC02-E711D7208603}"/>
-              </a:ext>
-            </a:extLst>
-          </p:cNvPr>
-          <p:cNvSpPr>
-            <a:spLocks xmlns:a="http://schemas.openxmlformats.org/drawingml/2006/main" noGrp="1"/>
-          </p:cNvSpPr>
-          <p:nvPr/>
-        </p:nvSpPr>
-        <p:spPr>
-          <a:xfrm xmlns:a="http://schemas.openxmlformats.org/drawingml/2006/main">
-            <a:off x="1714500" y="2181225"/>
-            <a:ext cx="9429750" cy="609600"/>
+                <a16:creationId xmlns:a16="http://schemas.microsoft.com/office/drawing/2014/main" id="{CAADEE9C-EFA1-4405-9FA4-2E2920246DF2}"/>
+              </a:ext>
+            </a:extLst>
+          </p:cNvPr>
+          <p:cNvSpPr>
+            <a:spLocks xmlns:a="http://schemas.openxmlformats.org/drawingml/2006/main" noGrp="1"/>
+          </p:cNvSpPr>
+          <p:nvPr/>
+        </p:nvSpPr>
+        <p:spPr>
+          <a:xfrm xmlns:a="http://schemas.openxmlformats.org/drawingml/2006/main">
+            <a:off x="1714500" y="2114550"/>
+            <a:ext cx="9525000" cy="809625"/>
           </a:xfrm>
           <a:prstGeom xmlns:a="http://schemas.openxmlformats.org/drawingml/2006/main" prst="rect">
             <a:avLst/>
@@ -8383,7 +8385,7 @@
           <a:lstStyle xmlns:a="http://schemas.openxmlformats.org/drawingml/2006/main"/>
           <a:p xmlns:a="http://schemas.openxmlformats.org/drawingml/2006/main">
             <a:pPr algn="l">
-              <a:defRPr sz="1500" b="0">
+              <a:defRPr sz="1725" b="0">
                 <a:solidFill>
                   <a:srgbClr val="17253A"/>
                 </a:solidFill>
@@ -8393,7 +8395,7 @@
               </a:defRPr>
             </a:pPr>
             <a:r>
-              <a:rPr sz="1500" b="0">
+              <a:rPr sz="1725" b="0">
                 <a:solidFill>
                   <a:srgbClr val="17253A"/>
                 </a:solidFill>
@@ -8401,7 +8403,7 @@
                 <a:ea typeface="Arial"/>
                 <a:cs typeface="Arial"/>
               </a:rPr>
-              <a:t>Identify the structure: Identify the three perpendicular dimensions in one unit.</a:t>
+              <a:t>Cuboid 12 cm × 7 cm × 5 cm</a:t>
             </a:r>
           </a:p>
         </p:txBody>
@@ -8411,28 +8413,30 @@
           <p:cNvPr id="14" name="">
             <a:extLst xmlns:a="http://schemas.openxmlformats.org/drawingml/2006/main">
               <a:ext uri="{FF2B5EF4-FFF2-40B4-BE49-F238E27FC236}">
-                <a16:creationId xmlns:a16="http://schemas.microsoft.com/office/drawing/2014/main" id="{822C565E-7C06-4753-9902-54C76020B4E5}"/>
-              </a:ext>
-            </a:extLst>
-          </p:cNvPr>
-          <p:cNvSpPr>
-            <a:spLocks xmlns:a="http://schemas.openxmlformats.org/drawingml/2006/main" noGrp="1"/>
-          </p:cNvSpPr>
-          <p:nvPr/>
-        </p:nvSpPr>
-        <p:spPr>
-          <a:xfrm xmlns:a="http://schemas.openxmlformats.org/drawingml/2006/main">
-            <a:off x="1000125" y="2990850"/>
-            <a:ext cx="476250" cy="476250"/>
-          </a:xfrm>
-          <a:prstGeom xmlns:a="http://schemas.openxmlformats.org/drawingml/2006/main" prst="ellipse">
+                <a16:creationId xmlns:a16="http://schemas.microsoft.com/office/drawing/2014/main" id="{50A9EBF9-88EB-4188-B902-5CC93275C165}"/>
+              </a:ext>
+            </a:extLst>
+          </p:cNvPr>
+          <p:cNvSpPr>
+            <a:spLocks xmlns:a="http://schemas.openxmlformats.org/drawingml/2006/main" noGrp="1"/>
+          </p:cNvSpPr>
+          <p:nvPr/>
+        </p:nvSpPr>
+        <p:spPr>
+          <a:xfrm xmlns:a="http://schemas.openxmlformats.org/drawingml/2006/main">
+            <a:off x="1714500" y="2943225"/>
+            <a:ext cx="9334500" cy="9525"/>
+          </a:xfrm>
+          <a:prstGeom xmlns:a="http://schemas.openxmlformats.org/drawingml/2006/main" prst="rect">
             <a:avLst/>
           </a:prstGeom>
           <a:solidFill xmlns:a="http://schemas.openxmlformats.org/drawingml/2006/main">
-            <a:srgbClr val="2C6E73"/>
+            <a:srgbClr val="D9E0E6"/>
           </a:solidFill>
           <a:ln xmlns:a="http://schemas.openxmlformats.org/drawingml/2006/main" w="0">
-            <a:noFill/>
+            <a:solidFill>
+              <a:srgbClr val="D9E0E6"/>
+            </a:solidFill>
           </a:ln>
         </p:spPr>
       </p:sp>
@@ -8441,19 +8445,19 @@
           <p:cNvPr id="15" name="">
             <a:extLst xmlns:a="http://schemas.openxmlformats.org/drawingml/2006/main">
               <a:ext uri="{FF2B5EF4-FFF2-40B4-BE49-F238E27FC236}">
-                <a16:creationId xmlns:a16="http://schemas.microsoft.com/office/drawing/2014/main" id="{425F29BB-2039-4A2D-8DBC-89E24A8EF4DA}"/>
-              </a:ext>
-            </a:extLst>
-          </p:cNvPr>
-          <p:cNvSpPr>
-            <a:spLocks xmlns:a="http://schemas.openxmlformats.org/drawingml/2006/main" noGrp="1"/>
-          </p:cNvSpPr>
-          <p:nvPr/>
-        </p:nvSpPr>
-        <p:spPr>
-          <a:xfrm xmlns:a="http://schemas.openxmlformats.org/drawingml/2006/main">
-            <a:off x="1000125" y="3019425"/>
-            <a:ext cx="476250" cy="419100"/>
+                <a16:creationId xmlns:a16="http://schemas.microsoft.com/office/drawing/2014/main" id="{1FB719D8-9283-4216-9C54-4A5AC8C84F8B}"/>
+              </a:ext>
+            </a:extLst>
+          </p:cNvPr>
+          <p:cNvSpPr>
+            <a:spLocks xmlns:a="http://schemas.openxmlformats.org/drawingml/2006/main" noGrp="1"/>
+          </p:cNvSpPr>
+          <p:nvPr/>
+        </p:nvSpPr>
+        <p:spPr>
+          <a:xfrm xmlns:a="http://schemas.openxmlformats.org/drawingml/2006/main">
+            <a:off x="1162050" y="3076575"/>
+            <a:ext cx="400050" cy="400050"/>
           </a:xfrm>
           <a:prstGeom xmlns:a="http://schemas.openxmlformats.org/drawingml/2006/main" prst="rect">
             <a:avLst/>
@@ -8470,9 +8474,9 @@
           <a:lstStyle xmlns:a="http://schemas.openxmlformats.org/drawingml/2006/main"/>
           <a:p xmlns:a="http://schemas.openxmlformats.org/drawingml/2006/main">
             <a:pPr algn="ctr">
-              <a:defRPr sz="1350" b="1">
-                <a:solidFill>
-                  <a:srgbClr val="FFFFFF"/>
+              <a:defRPr sz="1125" b="1">
+                <a:solidFill>
+                  <a:srgbClr val="2C6E73"/>
                 </a:solidFill>
                 <a:latin typeface="Arial"/>
                 <a:ea typeface="Arial"/>
@@ -8480,9 +8484,9 @@
               </a:defRPr>
             </a:pPr>
             <a:r>
-              <a:rPr sz="1350" b="1">
-                <a:solidFill>
-                  <a:srgbClr val="FFFFFF"/>
+              <a:rPr sz="1125" b="1">
+                <a:solidFill>
+                  <a:srgbClr val="2C6E73"/>
                 </a:solidFill>
                 <a:latin typeface="Arial"/>
                 <a:ea typeface="Arial"/>
@@ -8498,19 +8502,19 @@
           <p:cNvPr id="16" name="">
             <a:extLst xmlns:a="http://schemas.openxmlformats.org/drawingml/2006/main">
               <a:ext uri="{FF2B5EF4-FFF2-40B4-BE49-F238E27FC236}">
-                <a16:creationId xmlns:a16="http://schemas.microsoft.com/office/drawing/2014/main" id="{C2775197-A069-4D69-9A06-85488BCE6437}"/>
-              </a:ext>
-            </a:extLst>
-          </p:cNvPr>
-          <p:cNvSpPr>
-            <a:spLocks xmlns:a="http://schemas.openxmlformats.org/drawingml/2006/main" noGrp="1"/>
-          </p:cNvSpPr>
-          <p:nvPr/>
-        </p:nvSpPr>
-        <p:spPr>
-          <a:xfrm xmlns:a="http://schemas.openxmlformats.org/drawingml/2006/main">
-            <a:off x="1714500" y="2924175"/>
-            <a:ext cx="9429750" cy="609600"/>
+                <a16:creationId xmlns:a16="http://schemas.microsoft.com/office/drawing/2014/main" id="{3A023F35-4E46-4487-BC31-D25ABCEBFA34}"/>
+              </a:ext>
+            </a:extLst>
+          </p:cNvPr>
+          <p:cNvSpPr>
+            <a:spLocks xmlns:a="http://schemas.openxmlformats.org/drawingml/2006/main" noGrp="1"/>
+          </p:cNvSpPr>
+          <p:nvPr/>
+        </p:nvSpPr>
+        <p:spPr>
+          <a:xfrm xmlns:a="http://schemas.openxmlformats.org/drawingml/2006/main">
+            <a:off x="1714500" y="2990850"/>
+            <a:ext cx="9525000" cy="809625"/>
           </a:xfrm>
           <a:prstGeom xmlns:a="http://schemas.openxmlformats.org/drawingml/2006/main" prst="rect">
             <a:avLst/>
@@ -8527,7 +8531,7 @@
           <a:lstStyle xmlns:a="http://schemas.openxmlformats.org/drawingml/2006/main"/>
           <a:p xmlns:a="http://schemas.openxmlformats.org/drawingml/2006/main">
             <a:pPr algn="l">
-              <a:defRPr sz="1500" b="0">
+              <a:defRPr sz="1725" b="0">
                 <a:solidFill>
                   <a:srgbClr val="17253A"/>
                 </a:solidFill>
@@ -8537,7 +8541,7 @@
               </a:defRPr>
             </a:pPr>
             <a:r>
-              <a:rPr sz="1500" b="0">
+              <a:rPr sz="1725" b="0">
                 <a:solidFill>
                   <a:srgbClr val="17253A"/>
                 </a:solidFill>
@@ -8545,7 +8549,7 @@
                 <a:ea typeface="Arial"/>
                 <a:cs typeface="Arial"/>
               </a:rPr>
-              <a:t>Set up the method: Multiply length by width by height.</a:t>
+              <a:t>Base layer = 12 × 7 = 84 cm²</a:t>
             </a:r>
           </a:p>
         </p:txBody>
@@ -8555,28 +8559,30 @@
           <p:cNvPr id="17" name="">
             <a:extLst xmlns:a="http://schemas.openxmlformats.org/drawingml/2006/main">
               <a:ext uri="{FF2B5EF4-FFF2-40B4-BE49-F238E27FC236}">
-                <a16:creationId xmlns:a16="http://schemas.microsoft.com/office/drawing/2014/main" id="{07C1F7B2-8CF0-48A8-BE7A-5F16A8FB4373}"/>
-              </a:ext>
-            </a:extLst>
-          </p:cNvPr>
-          <p:cNvSpPr>
-            <a:spLocks xmlns:a="http://schemas.openxmlformats.org/drawingml/2006/main" noGrp="1"/>
-          </p:cNvSpPr>
-          <p:nvPr/>
-        </p:nvSpPr>
-        <p:spPr>
-          <a:xfrm xmlns:a="http://schemas.openxmlformats.org/drawingml/2006/main">
-            <a:off x="1000125" y="3733800"/>
-            <a:ext cx="476250" cy="476250"/>
-          </a:xfrm>
-          <a:prstGeom xmlns:a="http://schemas.openxmlformats.org/drawingml/2006/main" prst="ellipse">
+                <a16:creationId xmlns:a16="http://schemas.microsoft.com/office/drawing/2014/main" id="{CEACC2DC-6753-4777-91EB-8F4FA3887658}"/>
+              </a:ext>
+            </a:extLst>
+          </p:cNvPr>
+          <p:cNvSpPr>
+            <a:spLocks xmlns:a="http://schemas.openxmlformats.org/drawingml/2006/main" noGrp="1"/>
+          </p:cNvSpPr>
+          <p:nvPr/>
+        </p:nvSpPr>
+        <p:spPr>
+          <a:xfrm xmlns:a="http://schemas.openxmlformats.org/drawingml/2006/main">
+            <a:off x="1714500" y="3819525"/>
+            <a:ext cx="9334500" cy="9525"/>
+          </a:xfrm>
+          <a:prstGeom xmlns:a="http://schemas.openxmlformats.org/drawingml/2006/main" prst="rect">
             <a:avLst/>
           </a:prstGeom>
           <a:solidFill xmlns:a="http://schemas.openxmlformats.org/drawingml/2006/main">
-            <a:srgbClr val="2C6E73"/>
+            <a:srgbClr val="D9E0E6"/>
           </a:solidFill>
           <a:ln xmlns:a="http://schemas.openxmlformats.org/drawingml/2006/main" w="0">
-            <a:noFill/>
+            <a:solidFill>
+              <a:srgbClr val="D9E0E6"/>
+            </a:solidFill>
           </a:ln>
         </p:spPr>
       </p:sp>
@@ -8585,19 +8591,19 @@
           <p:cNvPr id="18" name="">
             <a:extLst xmlns:a="http://schemas.openxmlformats.org/drawingml/2006/main">
               <a:ext uri="{FF2B5EF4-FFF2-40B4-BE49-F238E27FC236}">
-                <a16:creationId xmlns:a16="http://schemas.microsoft.com/office/drawing/2014/main" id="{404738F3-DC77-4847-82AD-F12FEE4554E3}"/>
-              </a:ext>
-            </a:extLst>
-          </p:cNvPr>
-          <p:cNvSpPr>
-            <a:spLocks xmlns:a="http://schemas.openxmlformats.org/drawingml/2006/main" noGrp="1"/>
-          </p:cNvSpPr>
-          <p:nvPr/>
-        </p:nvSpPr>
-        <p:spPr>
-          <a:xfrm xmlns:a="http://schemas.openxmlformats.org/drawingml/2006/main">
-            <a:off x="1000125" y="3762375"/>
-            <a:ext cx="476250" cy="419100"/>
+                <a16:creationId xmlns:a16="http://schemas.microsoft.com/office/drawing/2014/main" id="{D3C757D8-71B4-4E55-BBEA-E1962376430C}"/>
+              </a:ext>
+            </a:extLst>
+          </p:cNvPr>
+          <p:cNvSpPr>
+            <a:spLocks xmlns:a="http://schemas.openxmlformats.org/drawingml/2006/main" noGrp="1"/>
+          </p:cNvSpPr>
+          <p:nvPr/>
+        </p:nvSpPr>
+        <p:spPr>
+          <a:xfrm xmlns:a="http://schemas.openxmlformats.org/drawingml/2006/main">
+            <a:off x="1162050" y="3952875"/>
+            <a:ext cx="400050" cy="400050"/>
           </a:xfrm>
           <a:prstGeom xmlns:a="http://schemas.openxmlformats.org/drawingml/2006/main" prst="rect">
             <a:avLst/>
@@ -8614,9 +8620,9 @@
           <a:lstStyle xmlns:a="http://schemas.openxmlformats.org/drawingml/2006/main"/>
           <a:p xmlns:a="http://schemas.openxmlformats.org/drawingml/2006/main">
             <a:pPr algn="ctr">
-              <a:defRPr sz="1350" b="1">
-                <a:solidFill>
-                  <a:srgbClr val="FFFFFF"/>
+              <a:defRPr sz="1125" b="1">
+                <a:solidFill>
+                  <a:srgbClr val="2C6E73"/>
                 </a:solidFill>
                 <a:latin typeface="Arial"/>
                 <a:ea typeface="Arial"/>
@@ -8624,9 +8630,9 @@
               </a:defRPr>
             </a:pPr>
             <a:r>
-              <a:rPr sz="1350" b="1">
-                <a:solidFill>
-                  <a:srgbClr val="FFFFFF"/>
+              <a:rPr sz="1125" b="1">
+                <a:solidFill>
+                  <a:srgbClr val="2C6E73"/>
                 </a:solidFill>
                 <a:latin typeface="Arial"/>
                 <a:ea typeface="Arial"/>
@@ -8642,19 +8648,19 @@
           <p:cNvPr id="19" name="">
             <a:extLst xmlns:a="http://schemas.openxmlformats.org/drawingml/2006/main">
               <a:ext uri="{FF2B5EF4-FFF2-40B4-BE49-F238E27FC236}">
-                <a16:creationId xmlns:a16="http://schemas.microsoft.com/office/drawing/2014/main" id="{8FA925B0-C9A9-41F5-B337-BB8AD5EC198D}"/>
-              </a:ext>
-            </a:extLst>
-          </p:cNvPr>
-          <p:cNvSpPr>
-            <a:spLocks xmlns:a="http://schemas.openxmlformats.org/drawingml/2006/main" noGrp="1"/>
-          </p:cNvSpPr>
-          <p:nvPr/>
-        </p:nvSpPr>
-        <p:spPr>
-          <a:xfrm xmlns:a="http://schemas.openxmlformats.org/drawingml/2006/main">
-            <a:off x="1714500" y="3667125"/>
-            <a:ext cx="9429750" cy="609600"/>
+                <a16:creationId xmlns:a16="http://schemas.microsoft.com/office/drawing/2014/main" id="{859502B7-4ECA-4DD6-803D-DB6AF920D30E}"/>
+              </a:ext>
+            </a:extLst>
+          </p:cNvPr>
+          <p:cNvSpPr>
+            <a:spLocks xmlns:a="http://schemas.openxmlformats.org/drawingml/2006/main" noGrp="1"/>
+          </p:cNvSpPr>
+          <p:nvPr/>
+        </p:nvSpPr>
+        <p:spPr>
+          <a:xfrm xmlns:a="http://schemas.openxmlformats.org/drawingml/2006/main">
+            <a:off x="1714500" y="3867150"/>
+            <a:ext cx="9525000" cy="809625"/>
           </a:xfrm>
           <a:prstGeom xmlns:a="http://schemas.openxmlformats.org/drawingml/2006/main" prst="rect">
             <a:avLst/>
@@ -8671,7 +8677,7 @@
           <a:lstStyle xmlns:a="http://schemas.openxmlformats.org/drawingml/2006/main"/>
           <a:p xmlns:a="http://schemas.openxmlformats.org/drawingml/2006/main">
             <a:pPr algn="l">
-              <a:defRPr sz="1500" b="0">
+              <a:defRPr sz="1725" b="0">
                 <a:solidFill>
                   <a:srgbClr val="17253A"/>
                 </a:solidFill>
@@ -8681,7 +8687,7 @@
               </a:defRPr>
             </a:pPr>
             <a:r>
-              <a:rPr sz="1500" b="0">
+              <a:rPr sz="1725" b="0">
                 <a:solidFill>
                   <a:srgbClr val="17253A"/>
                 </a:solidFill>
@@ -8689,7 +8695,7 @@
                 <a:ea typeface="Arial"/>
                 <a:cs typeface="Arial"/>
               </a:rPr>
-              <a:t>Complete the calculation: 420 cm3.</a:t>
+              <a:t>84 × 5</a:t>
             </a:r>
           </a:p>
         </p:txBody>
@@ -8699,28 +8705,30 @@
           <p:cNvPr id="20" name="">
             <a:extLst xmlns:a="http://schemas.openxmlformats.org/drawingml/2006/main">
               <a:ext uri="{FF2B5EF4-FFF2-40B4-BE49-F238E27FC236}">
-                <a16:creationId xmlns:a16="http://schemas.microsoft.com/office/drawing/2014/main" id="{B8EECEF8-A2B4-4D36-B6A9-507528DA40AC}"/>
-              </a:ext>
-            </a:extLst>
-          </p:cNvPr>
-          <p:cNvSpPr>
-            <a:spLocks xmlns:a="http://schemas.openxmlformats.org/drawingml/2006/main" noGrp="1"/>
-          </p:cNvSpPr>
-          <p:nvPr/>
-        </p:nvSpPr>
-        <p:spPr>
-          <a:xfrm xmlns:a="http://schemas.openxmlformats.org/drawingml/2006/main">
-            <a:off x="1000125" y="4476750"/>
-            <a:ext cx="476250" cy="476250"/>
-          </a:xfrm>
-          <a:prstGeom xmlns:a="http://schemas.openxmlformats.org/drawingml/2006/main" prst="ellipse">
+                <a16:creationId xmlns:a16="http://schemas.microsoft.com/office/drawing/2014/main" id="{5A2162BC-DA7A-4909-B631-F2FA0DD1C6E9}"/>
+              </a:ext>
+            </a:extLst>
+          </p:cNvPr>
+          <p:cNvSpPr>
+            <a:spLocks xmlns:a="http://schemas.openxmlformats.org/drawingml/2006/main" noGrp="1"/>
+          </p:cNvSpPr>
+          <p:nvPr/>
+        </p:nvSpPr>
+        <p:spPr>
+          <a:xfrm xmlns:a="http://schemas.openxmlformats.org/drawingml/2006/main">
+            <a:off x="1714500" y="4695825"/>
+            <a:ext cx="9334500" cy="9525"/>
+          </a:xfrm>
+          <a:prstGeom xmlns:a="http://schemas.openxmlformats.org/drawingml/2006/main" prst="rect">
             <a:avLst/>
           </a:prstGeom>
           <a:solidFill xmlns:a="http://schemas.openxmlformats.org/drawingml/2006/main">
-            <a:srgbClr val="2C6E73"/>
+            <a:srgbClr val="D9E0E6"/>
           </a:solidFill>
           <a:ln xmlns:a="http://schemas.openxmlformats.org/drawingml/2006/main" w="0">
-            <a:noFill/>
+            <a:solidFill>
+              <a:srgbClr val="D9E0E6"/>
+            </a:solidFill>
           </a:ln>
         </p:spPr>
       </p:sp>
@@ -8729,19 +8737,19 @@
           <p:cNvPr id="21" name="">
             <a:extLst xmlns:a="http://schemas.openxmlformats.org/drawingml/2006/main">
               <a:ext uri="{FF2B5EF4-FFF2-40B4-BE49-F238E27FC236}">
-                <a16:creationId xmlns:a16="http://schemas.microsoft.com/office/drawing/2014/main" id="{5449362E-0F4E-4728-8264-91C6976A66D4}"/>
-              </a:ext>
-            </a:extLst>
-          </p:cNvPr>
-          <p:cNvSpPr>
-            <a:spLocks xmlns:a="http://schemas.openxmlformats.org/drawingml/2006/main" noGrp="1"/>
-          </p:cNvSpPr>
-          <p:nvPr/>
-        </p:nvSpPr>
-        <p:spPr>
-          <a:xfrm xmlns:a="http://schemas.openxmlformats.org/drawingml/2006/main">
-            <a:off x="1000125" y="4505325"/>
-            <a:ext cx="476250" cy="419100"/>
+                <a16:creationId xmlns:a16="http://schemas.microsoft.com/office/drawing/2014/main" id="{C32BB8A6-51C3-4011-9FDE-05D3BD3B8C07}"/>
+              </a:ext>
+            </a:extLst>
+          </p:cNvPr>
+          <p:cNvSpPr>
+            <a:spLocks xmlns:a="http://schemas.openxmlformats.org/drawingml/2006/main" noGrp="1"/>
+          </p:cNvSpPr>
+          <p:nvPr/>
+        </p:nvSpPr>
+        <p:spPr>
+          <a:xfrm xmlns:a="http://schemas.openxmlformats.org/drawingml/2006/main">
+            <a:off x="1162050" y="4829175"/>
+            <a:ext cx="400050" cy="400050"/>
           </a:xfrm>
           <a:prstGeom xmlns:a="http://schemas.openxmlformats.org/drawingml/2006/main" prst="rect">
             <a:avLst/>
@@ -8758,9 +8766,9 @@
           <a:lstStyle xmlns:a="http://schemas.openxmlformats.org/drawingml/2006/main"/>
           <a:p xmlns:a="http://schemas.openxmlformats.org/drawingml/2006/main">
             <a:pPr algn="ctr">
-              <a:defRPr sz="1350" b="1">
-                <a:solidFill>
-                  <a:srgbClr val="FFFFFF"/>
+              <a:defRPr sz="1125" b="1">
+                <a:solidFill>
+                  <a:srgbClr val="2F785D"/>
                 </a:solidFill>
                 <a:latin typeface="Arial"/>
                 <a:ea typeface="Arial"/>
@@ -8768,9 +8776,9 @@
               </a:defRPr>
             </a:pPr>
             <a:r>
-              <a:rPr sz="1350" b="1">
-                <a:solidFill>
-                  <a:srgbClr val="FFFFFF"/>
+              <a:rPr sz="1125" b="1">
+                <a:solidFill>
+                  <a:srgbClr val="2F785D"/>
                 </a:solidFill>
                 <a:latin typeface="Arial"/>
                 <a:ea typeface="Arial"/>
@@ -8786,19 +8794,19 @@
           <p:cNvPr id="22" name="">
             <a:extLst xmlns:a="http://schemas.openxmlformats.org/drawingml/2006/main">
               <a:ext uri="{FF2B5EF4-FFF2-40B4-BE49-F238E27FC236}">
-                <a16:creationId xmlns:a16="http://schemas.microsoft.com/office/drawing/2014/main" id="{419ADAC8-AB32-4F8C-A529-D874EF0E798B}"/>
-              </a:ext>
-            </a:extLst>
-          </p:cNvPr>
-          <p:cNvSpPr>
-            <a:spLocks xmlns:a="http://schemas.openxmlformats.org/drawingml/2006/main" noGrp="1"/>
-          </p:cNvSpPr>
-          <p:nvPr/>
-        </p:nvSpPr>
-        <p:spPr>
-          <a:xfrm xmlns:a="http://schemas.openxmlformats.org/drawingml/2006/main">
-            <a:off x="1714500" y="4410075"/>
-            <a:ext cx="9429750" cy="609600"/>
+                <a16:creationId xmlns:a16="http://schemas.microsoft.com/office/drawing/2014/main" id="{7460EC7A-8EA2-4F5E-AF6F-B30368CC67A1}"/>
+              </a:ext>
+            </a:extLst>
+          </p:cNvPr>
+          <p:cNvSpPr>
+            <a:spLocks xmlns:a="http://schemas.openxmlformats.org/drawingml/2006/main" noGrp="1"/>
+          </p:cNvSpPr>
+          <p:nvPr/>
+        </p:nvSpPr>
+        <p:spPr>
+          <a:xfrm xmlns:a="http://schemas.openxmlformats.org/drawingml/2006/main">
+            <a:off x="1714500" y="4743450"/>
+            <a:ext cx="9525000" cy="809625"/>
           </a:xfrm>
           <a:prstGeom xmlns:a="http://schemas.openxmlformats.org/drawingml/2006/main" prst="rect">
             <a:avLst/>
@@ -8815,7 +8823,7 @@
           <a:lstStyle xmlns:a="http://schemas.openxmlformats.org/drawingml/2006/main"/>
           <a:p xmlns:a="http://schemas.openxmlformats.org/drawingml/2006/main">
             <a:pPr algn="l">
-              <a:defRPr sz="1500" b="1">
+              <a:defRPr sz="1725" b="1">
                 <a:solidFill>
                   <a:srgbClr val="2F785D"/>
                 </a:solidFill>
@@ -8825,7 +8833,7 @@
               </a:defRPr>
             </a:pPr>
             <a:r>
-              <a:rPr sz="1500" b="1">
+              <a:rPr sz="1725" b="1">
                 <a:solidFill>
                   <a:srgbClr val="2F785D"/>
                 </a:solidFill>
@@ -8833,7 +8841,7 @@
                 <a:ea typeface="Arial"/>
                 <a:cs typeface="Arial"/>
               </a:rPr>
-              <a:t>Check the result: Use cubic units and compare the result with an estimate.</a:t>
+              <a:t>420 cm³</a:t>
             </a:r>
           </a:p>
         </p:txBody>
@@ -8841,7 +8849,7 @@
     </p:spTree>
     <p:extLst>
       <p:ext uri="{BB962C8B-B14F-4D97-AF65-F5344CB8AC3E}">
-        <p14:creationId xmlns:p14="http://schemas.microsoft.com/office/powerpoint/2010/main" val="895832336"/>
+        <p14:creationId xmlns:p14="http://schemas.microsoft.com/office/powerpoint/2010/main" val="1373421972"/>
       </p:ext>
     </p:extLst>
   </p:cSld>
@@ -9134,7 +9142,7 @@
           <p:cNvPr id="15" name="">
             <a:extLst xmlns:a="http://schemas.openxmlformats.org/drawingml/2006/main">
               <a:ext uri="{FF2B5EF4-FFF2-40B4-BE49-F238E27FC236}">
-                <a16:creationId xmlns:a16="http://schemas.microsoft.com/office/drawing/2014/main" id="{0659F5B0-6696-493B-A879-82A952B42836}"/>
+                <a16:creationId xmlns:a16="http://schemas.microsoft.com/office/drawing/2014/main" id="{F7C3240A-D8DB-4D5F-AD23-7B93935C1FFA}"/>
               </a:ext>
             </a:extLst>
           </p:cNvPr>
@@ -9166,7 +9174,7 @@
           <p:cNvPr id="2" name="">
             <a:extLst xmlns:a="http://schemas.openxmlformats.org/drawingml/2006/main">
               <a:ext uri="{FF2B5EF4-FFF2-40B4-BE49-F238E27FC236}">
-                <a16:creationId xmlns:a16="http://schemas.microsoft.com/office/drawing/2014/main" id="{8E140231-82AE-4544-B8B8-75E6071162AE}"/>
+                <a16:creationId xmlns:a16="http://schemas.microsoft.com/office/drawing/2014/main" id="{F4B424E6-7B2B-469C-97F9-038353BEE7B1}"/>
               </a:ext>
             </a:extLst>
           </p:cNvPr>
@@ -9223,7 +9231,7 @@
           <p:cNvPr id="3" name="">
             <a:extLst xmlns:a="http://schemas.openxmlformats.org/drawingml/2006/main">
               <a:ext uri="{FF2B5EF4-FFF2-40B4-BE49-F238E27FC236}">
-                <a16:creationId xmlns:a16="http://schemas.microsoft.com/office/drawing/2014/main" id="{D166EB87-4588-4148-BBB2-CE6DEA178346}"/>
+                <a16:creationId xmlns:a16="http://schemas.microsoft.com/office/drawing/2014/main" id="{C6AD7647-74C2-4C23-82FD-6AFCB549B259}"/>
               </a:ext>
             </a:extLst>
           </p:cNvPr>
@@ -9255,7 +9263,7 @@
           <p:cNvPr id="4" name="">
             <a:extLst xmlns:a="http://schemas.openxmlformats.org/drawingml/2006/main">
               <a:ext uri="{FF2B5EF4-FFF2-40B4-BE49-F238E27FC236}">
-                <a16:creationId xmlns:a16="http://schemas.microsoft.com/office/drawing/2014/main" id="{94204176-FFD4-423C-85FA-8F490032B178}"/>
+                <a16:creationId xmlns:a16="http://schemas.microsoft.com/office/drawing/2014/main" id="{B7A751EA-089C-4865-8765-3B279ADFF6EC}"/>
               </a:ext>
             </a:extLst>
           </p:cNvPr>
@@ -9312,7 +9320,7 @@
           <p:cNvPr id="5" name="">
             <a:extLst xmlns:a="http://schemas.openxmlformats.org/drawingml/2006/main">
               <a:ext uri="{FF2B5EF4-FFF2-40B4-BE49-F238E27FC236}">
-                <a16:creationId xmlns:a16="http://schemas.microsoft.com/office/drawing/2014/main" id="{408A0059-1DD0-44BE-AA6D-5080698EF6D0}"/>
+                <a16:creationId xmlns:a16="http://schemas.microsoft.com/office/drawing/2014/main" id="{3DE89738-9973-4F7E-B3B5-60AE9C8F5005}"/>
               </a:ext>
             </a:extLst>
           </p:cNvPr>
@@ -9369,7 +9377,7 @@
           <p:cNvPr id="6" name="">
             <a:extLst xmlns:a="http://schemas.openxmlformats.org/drawingml/2006/main">
               <a:ext uri="{FF2B5EF4-FFF2-40B4-BE49-F238E27FC236}">
-                <a16:creationId xmlns:a16="http://schemas.microsoft.com/office/drawing/2014/main" id="{09F181A4-67A8-42BA-AEC3-3792DB0504B6}"/>
+                <a16:creationId xmlns:a16="http://schemas.microsoft.com/office/drawing/2014/main" id="{AACFFC66-9656-4BC5-8E3C-3447DCAF79A2}"/>
               </a:ext>
             </a:extLst>
           </p:cNvPr>
@@ -9426,7 +9434,7 @@
           <p:cNvPr id="7" name="">
             <a:extLst xmlns:a="http://schemas.openxmlformats.org/drawingml/2006/main">
               <a:ext uri="{FF2B5EF4-FFF2-40B4-BE49-F238E27FC236}">
-                <a16:creationId xmlns:a16="http://schemas.microsoft.com/office/drawing/2014/main" id="{430DE9C0-E344-4C63-9DA2-C530F4D8F445}"/>
+                <a16:creationId xmlns:a16="http://schemas.microsoft.com/office/drawing/2014/main" id="{F824D5C8-85FE-4EFB-AD83-9E6DBA72FE03}"/>
               </a:ext>
             </a:extLst>
           </p:cNvPr>
@@ -9458,7 +9466,7 @@
           <p:cNvPr id="8" name="">
             <a:extLst xmlns:a="http://schemas.openxmlformats.org/drawingml/2006/main">
               <a:ext uri="{FF2B5EF4-FFF2-40B4-BE49-F238E27FC236}">
-                <a16:creationId xmlns:a16="http://schemas.microsoft.com/office/drawing/2014/main" id="{337D9FD9-80A3-47C1-BD1A-8F9653D26B11}"/>
+                <a16:creationId xmlns:a16="http://schemas.microsoft.com/office/drawing/2014/main" id="{71D58D5E-992C-46BF-AF43-A93F8323505A}"/>
               </a:ext>
             </a:extLst>
           </p:cNvPr>
@@ -9515,7 +9523,7 @@
           <p:cNvPr id="9" name="">
             <a:extLst xmlns:a="http://schemas.openxmlformats.org/drawingml/2006/main">
               <a:ext uri="{FF2B5EF4-FFF2-40B4-BE49-F238E27FC236}">
-                <a16:creationId xmlns:a16="http://schemas.microsoft.com/office/drawing/2014/main" id="{86AD2141-667D-4F4B-ADC0-472E7F6B575A}"/>
+                <a16:creationId xmlns:a16="http://schemas.microsoft.com/office/drawing/2014/main" id="{1DC27D61-6096-4BD7-B939-A1D3BCFCFEB0}"/>
               </a:ext>
             </a:extLst>
           </p:cNvPr>
@@ -9572,7 +9580,7 @@
           <p:cNvPr id="10" name="">
             <a:extLst xmlns:a="http://schemas.openxmlformats.org/drawingml/2006/main">
               <a:ext uri="{FF2B5EF4-FFF2-40B4-BE49-F238E27FC236}">
-                <a16:creationId xmlns:a16="http://schemas.microsoft.com/office/drawing/2014/main" id="{270B8AD8-1746-4096-B837-EF212D23320E}"/>
+                <a16:creationId xmlns:a16="http://schemas.microsoft.com/office/drawing/2014/main" id="{54FC0FDB-1107-430F-90A7-A3403EF67705}"/>
               </a:ext>
             </a:extLst>
           </p:cNvPr>
@@ -9629,7 +9637,7 @@
           <p:cNvPr id="11" name="">
             <a:extLst xmlns:a="http://schemas.openxmlformats.org/drawingml/2006/main">
               <a:ext uri="{FF2B5EF4-FFF2-40B4-BE49-F238E27FC236}">
-                <a16:creationId xmlns:a16="http://schemas.microsoft.com/office/drawing/2014/main" id="{AC222A35-C8A6-4A13-9AF9-703F0365D1B1}"/>
+                <a16:creationId xmlns:a16="http://schemas.microsoft.com/office/drawing/2014/main" id="{699B17B9-7DCD-462C-B3D8-2DDD16CF0CD9}"/>
               </a:ext>
             </a:extLst>
           </p:cNvPr>
@@ -9686,7 +9694,7 @@
           <p:cNvPr id="12" name="">
             <a:extLst xmlns:a="http://schemas.openxmlformats.org/drawingml/2006/main">
               <a:ext uri="{FF2B5EF4-FFF2-40B4-BE49-F238E27FC236}">
-                <a16:creationId xmlns:a16="http://schemas.microsoft.com/office/drawing/2014/main" id="{D6947952-68E0-4212-A7F5-0125E7AB920C}"/>
+                <a16:creationId xmlns:a16="http://schemas.microsoft.com/office/drawing/2014/main" id="{2C6F0EE2-2A2E-4A6A-8AC3-55C18713BD91}"/>
               </a:ext>
             </a:extLst>
           </p:cNvPr>
@@ -9718,7 +9726,7 @@
           <p:cNvPr id="13" name="">
             <a:extLst xmlns:a="http://schemas.openxmlformats.org/drawingml/2006/main">
               <a:ext uri="{FF2B5EF4-FFF2-40B4-BE49-F238E27FC236}">
-                <a16:creationId xmlns:a16="http://schemas.microsoft.com/office/drawing/2014/main" id="{EAABDDA2-CE5A-42A7-891F-787105CA58DF}"/>
+                <a16:creationId xmlns:a16="http://schemas.microsoft.com/office/drawing/2014/main" id="{4E98C2F4-52A6-4D25-89DB-3F8B96A1A084}"/>
               </a:ext>
             </a:extLst>
           </p:cNvPr>
@@ -9775,7 +9783,7 @@
           <p:cNvPr id="14" name="">
             <a:extLst xmlns:a="http://schemas.openxmlformats.org/drawingml/2006/main">
               <a:ext uri="{FF2B5EF4-FFF2-40B4-BE49-F238E27FC236}">
-                <a16:creationId xmlns:a16="http://schemas.microsoft.com/office/drawing/2014/main" id="{C1924C25-3A15-48C2-9148-2B4EFF134184}"/>
+                <a16:creationId xmlns:a16="http://schemas.microsoft.com/office/drawing/2014/main" id="{9F2F7E79-3F9E-4DC6-8F53-763C27949EE1}"/>
               </a:ext>
             </a:extLst>
           </p:cNvPr>
@@ -9830,7 +9838,7 @@
     </p:spTree>
     <p:extLst>
       <p:ext uri="{BB962C8B-B14F-4D97-AF65-F5344CB8AC3E}">
-        <p14:creationId xmlns:p14="http://schemas.microsoft.com/office/powerpoint/2010/main" val="1240859197"/>
+        <p14:creationId xmlns:p14="http://schemas.microsoft.com/office/powerpoint/2010/main" val="1060037562"/>
       </p:ext>
     </p:extLst>
   </p:cSld>
@@ -10031,7 +10039,7 @@
           <p:cNvPr id="16" name="">
             <a:extLst xmlns:a="http://schemas.openxmlformats.org/drawingml/2006/main">
               <a:ext uri="{FF2B5EF4-FFF2-40B4-BE49-F238E27FC236}">
-                <a16:creationId xmlns:a16="http://schemas.microsoft.com/office/drawing/2014/main" id="{E3D2823B-72D8-42BE-AC94-78E8A55A3EF2}"/>
+                <a16:creationId xmlns:a16="http://schemas.microsoft.com/office/drawing/2014/main" id="{D4F53265-C28F-446C-AD42-582B6D6A5636}"/>
               </a:ext>
             </a:extLst>
           </p:cNvPr>
@@ -10063,7 +10071,7 @@
           <p:cNvPr id="2" name="">
             <a:extLst xmlns:a="http://schemas.openxmlformats.org/drawingml/2006/main">
               <a:ext uri="{FF2B5EF4-FFF2-40B4-BE49-F238E27FC236}">
-                <a16:creationId xmlns:a16="http://schemas.microsoft.com/office/drawing/2014/main" id="{AFECEA93-7B37-4C85-8561-21C3B808C3B1}"/>
+                <a16:creationId xmlns:a16="http://schemas.microsoft.com/office/drawing/2014/main" id="{6290875D-CABA-4C95-9CD9-428EA6D06336}"/>
               </a:ext>
             </a:extLst>
           </p:cNvPr>
@@ -10120,7 +10128,7 @@
           <p:cNvPr id="3" name="">
             <a:extLst xmlns:a="http://schemas.openxmlformats.org/drawingml/2006/main">
               <a:ext uri="{FF2B5EF4-FFF2-40B4-BE49-F238E27FC236}">
-                <a16:creationId xmlns:a16="http://schemas.microsoft.com/office/drawing/2014/main" id="{3D74EB7B-221A-41AA-BD67-D0A41F3D3117}"/>
+                <a16:creationId xmlns:a16="http://schemas.microsoft.com/office/drawing/2014/main" id="{508A086F-8EF5-4ADB-B3ED-7503C5991D84}"/>
               </a:ext>
             </a:extLst>
           </p:cNvPr>
@@ -10152,7 +10160,7 @@
           <p:cNvPr id="4" name="">
             <a:extLst xmlns:a="http://schemas.openxmlformats.org/drawingml/2006/main">
               <a:ext uri="{FF2B5EF4-FFF2-40B4-BE49-F238E27FC236}">
-                <a16:creationId xmlns:a16="http://schemas.microsoft.com/office/drawing/2014/main" id="{EDA4393D-B26A-43B9-80F8-6C3E10DA23B1}"/>
+                <a16:creationId xmlns:a16="http://schemas.microsoft.com/office/drawing/2014/main" id="{486380E3-0893-4A43-995D-045C7A5FF5D3}"/>
               </a:ext>
             </a:extLst>
           </p:cNvPr>
@@ -10209,7 +10217,7 @@
           <p:cNvPr id="5" name="">
             <a:extLst xmlns:a="http://schemas.openxmlformats.org/drawingml/2006/main">
               <a:ext uri="{FF2B5EF4-FFF2-40B4-BE49-F238E27FC236}">
-                <a16:creationId xmlns:a16="http://schemas.microsoft.com/office/drawing/2014/main" id="{EA51C120-6CE3-4AE5-90EB-D9E547FC8E03}"/>
+                <a16:creationId xmlns:a16="http://schemas.microsoft.com/office/drawing/2014/main" id="{6B96770A-EC39-4A52-87CC-74EEDBDEADC4}"/>
               </a:ext>
             </a:extLst>
           </p:cNvPr>
@@ -10266,7 +10274,7 @@
           <p:cNvPr id="6" name="">
             <a:extLst xmlns:a="http://schemas.openxmlformats.org/drawingml/2006/main">
               <a:ext uri="{FF2B5EF4-FFF2-40B4-BE49-F238E27FC236}">
-                <a16:creationId xmlns:a16="http://schemas.microsoft.com/office/drawing/2014/main" id="{38AA7445-A1A4-4B30-95C8-C3F690ACF9FB}"/>
+                <a16:creationId xmlns:a16="http://schemas.microsoft.com/office/drawing/2014/main" id="{5241ADFC-EE51-4B87-B12E-3E05E1A4961E}"/>
               </a:ext>
             </a:extLst>
           </p:cNvPr>
@@ -10323,7 +10331,7 @@
           <p:cNvPr id="7" name="">
             <a:extLst xmlns:a="http://schemas.openxmlformats.org/drawingml/2006/main">
               <a:ext uri="{FF2B5EF4-FFF2-40B4-BE49-F238E27FC236}">
-                <a16:creationId xmlns:a16="http://schemas.microsoft.com/office/drawing/2014/main" id="{E788803F-ECAC-406D-981A-C922B093653A}"/>
+                <a16:creationId xmlns:a16="http://schemas.microsoft.com/office/drawing/2014/main" id="{CD7F235A-0492-449D-87DA-951354372D93}"/>
               </a:ext>
             </a:extLst>
           </p:cNvPr>
@@ -10355,7 +10363,7 @@
           <p:cNvPr id="8" name="">
             <a:extLst xmlns:a="http://schemas.openxmlformats.org/drawingml/2006/main">
               <a:ext uri="{FF2B5EF4-FFF2-40B4-BE49-F238E27FC236}">
-                <a16:creationId xmlns:a16="http://schemas.microsoft.com/office/drawing/2014/main" id="{641310ED-06C7-4E53-8D97-78A5E860B0AA}"/>
+                <a16:creationId xmlns:a16="http://schemas.microsoft.com/office/drawing/2014/main" id="{569EF70E-F54E-42EC-9A3B-C4CA2528C7B0}"/>
               </a:ext>
             </a:extLst>
           </p:cNvPr>
@@ -10412,7 +10420,7 @@
           <p:cNvPr id="9" name="">
             <a:extLst xmlns:a="http://schemas.openxmlformats.org/drawingml/2006/main">
               <a:ext uri="{FF2B5EF4-FFF2-40B4-BE49-F238E27FC236}">
-                <a16:creationId xmlns:a16="http://schemas.microsoft.com/office/drawing/2014/main" id="{873707BA-C927-4BCE-9CC1-DCAA05645CAF}"/>
+                <a16:creationId xmlns:a16="http://schemas.microsoft.com/office/drawing/2014/main" id="{9DF49414-74EC-4B93-8E72-7DDBB99A84D8}"/>
               </a:ext>
             </a:extLst>
           </p:cNvPr>
@@ -10469,7 +10477,7 @@
           <p:cNvPr id="10" name="">
             <a:extLst xmlns:a="http://schemas.openxmlformats.org/drawingml/2006/main">
               <a:ext uri="{FF2B5EF4-FFF2-40B4-BE49-F238E27FC236}">
-                <a16:creationId xmlns:a16="http://schemas.microsoft.com/office/drawing/2014/main" id="{748EEB94-AB59-4196-8167-54E9C4CF93EA}"/>
+                <a16:creationId xmlns:a16="http://schemas.microsoft.com/office/drawing/2014/main" id="{9CF3F38A-2E08-4FFF-BCBB-9F08B0AAE853}"/>
               </a:ext>
             </a:extLst>
           </p:cNvPr>
@@ -10526,7 +10534,7 @@
           <p:cNvPr id="11" name="">
             <a:extLst xmlns:a="http://schemas.openxmlformats.org/drawingml/2006/main">
               <a:ext uri="{FF2B5EF4-FFF2-40B4-BE49-F238E27FC236}">
-                <a16:creationId xmlns:a16="http://schemas.microsoft.com/office/drawing/2014/main" id="{4701084E-A1EF-4FD4-BEBF-C95C96504F57}"/>
+                <a16:creationId xmlns:a16="http://schemas.microsoft.com/office/drawing/2014/main" id="{3E6D725C-67F8-4475-9FA9-6760E761C484}"/>
               </a:ext>
             </a:extLst>
           </p:cNvPr>
@@ -10583,7 +10591,7 @@
           <p:cNvPr id="12" name="">
             <a:extLst xmlns:a="http://schemas.openxmlformats.org/drawingml/2006/main">
               <a:ext uri="{FF2B5EF4-FFF2-40B4-BE49-F238E27FC236}">
-                <a16:creationId xmlns:a16="http://schemas.microsoft.com/office/drawing/2014/main" id="{C2956796-BECC-4AC9-9821-2F8139766EA2}"/>
+                <a16:creationId xmlns:a16="http://schemas.microsoft.com/office/drawing/2014/main" id="{5BDEC1BB-658C-4846-ACD0-E1F9634842F0}"/>
               </a:ext>
             </a:extLst>
           </p:cNvPr>
@@ -10640,7 +10648,7 @@
           <p:cNvPr id="13" name="">
             <a:extLst xmlns:a="http://schemas.openxmlformats.org/drawingml/2006/main">
               <a:ext uri="{FF2B5EF4-FFF2-40B4-BE49-F238E27FC236}">
-                <a16:creationId xmlns:a16="http://schemas.microsoft.com/office/drawing/2014/main" id="{9B0958D2-2F4A-4D92-91AB-22E7EB3A9D86}"/>
+                <a16:creationId xmlns:a16="http://schemas.microsoft.com/office/drawing/2014/main" id="{B9568F88-BF23-4E92-8DC1-F93F6E33FDA5}"/>
               </a:ext>
             </a:extLst>
           </p:cNvPr>
@@ -10697,7 +10705,7 @@
           <p:cNvPr id="14" name="">
             <a:extLst xmlns:a="http://schemas.openxmlformats.org/drawingml/2006/main">
               <a:ext uri="{FF2B5EF4-FFF2-40B4-BE49-F238E27FC236}">
-                <a16:creationId xmlns:a16="http://schemas.microsoft.com/office/drawing/2014/main" id="{9124CD85-364E-4591-AA53-6E0297501C56}"/>
+                <a16:creationId xmlns:a16="http://schemas.microsoft.com/office/drawing/2014/main" id="{330AB268-81A0-4389-9A9E-DCA73F122FD1}"/>
               </a:ext>
             </a:extLst>
           </p:cNvPr>
@@ -10754,7 +10762,7 @@
           <p:cNvPr id="15" name="">
             <a:extLst xmlns:a="http://schemas.openxmlformats.org/drawingml/2006/main">
               <a:ext uri="{FF2B5EF4-FFF2-40B4-BE49-F238E27FC236}">
-                <a16:creationId xmlns:a16="http://schemas.microsoft.com/office/drawing/2014/main" id="{517576A2-6382-47E6-B378-C9BCD97B6CE2}"/>
+                <a16:creationId xmlns:a16="http://schemas.microsoft.com/office/drawing/2014/main" id="{13158D50-EDF9-4982-8EF0-993DC4285977}"/>
               </a:ext>
             </a:extLst>
           </p:cNvPr>
@@ -10809,7 +10817,7 @@
     </p:spTree>
     <p:extLst>
       <p:ext uri="{BB962C8B-B14F-4D97-AF65-F5344CB8AC3E}">
-        <p14:creationId xmlns:p14="http://schemas.microsoft.com/office/powerpoint/2010/main" val="1131681407"/>
+        <p14:creationId xmlns:p14="http://schemas.microsoft.com/office/powerpoint/2010/main" val="551454364"/>
       </p:ext>
     </p:extLst>
   </p:cSld>
@@ -10964,7 +10972,7 @@
           <p:cNvPr id="16" name="">
             <a:extLst xmlns:a="http://schemas.openxmlformats.org/drawingml/2006/main">
               <a:ext uri="{FF2B5EF4-FFF2-40B4-BE49-F238E27FC236}">
-                <a16:creationId xmlns:a16="http://schemas.microsoft.com/office/drawing/2014/main" id="{792C86F8-8D3D-45EE-BA15-AF4939CD1A2D}"/>
+                <a16:creationId xmlns:a16="http://schemas.microsoft.com/office/drawing/2014/main" id="{7E20A4F0-BE92-4A06-A0D1-61095138359A}"/>
               </a:ext>
             </a:extLst>
           </p:cNvPr>
@@ -10996,7 +11004,7 @@
           <p:cNvPr id="2" name="">
             <a:extLst xmlns:a="http://schemas.openxmlformats.org/drawingml/2006/main">
               <a:ext uri="{FF2B5EF4-FFF2-40B4-BE49-F238E27FC236}">
-                <a16:creationId xmlns:a16="http://schemas.microsoft.com/office/drawing/2014/main" id="{6F190650-5970-4554-9755-06953D4FA803}"/>
+                <a16:creationId xmlns:a16="http://schemas.microsoft.com/office/drawing/2014/main" id="{2AF8E481-46FD-421E-9690-B990A530B46C}"/>
               </a:ext>
             </a:extLst>
           </p:cNvPr>
@@ -11053,7 +11061,7 @@
           <p:cNvPr id="3" name="">
             <a:extLst xmlns:a="http://schemas.openxmlformats.org/drawingml/2006/main">
               <a:ext uri="{FF2B5EF4-FFF2-40B4-BE49-F238E27FC236}">
-                <a16:creationId xmlns:a16="http://schemas.microsoft.com/office/drawing/2014/main" id="{9BE31B63-3F8E-4F97-A9B5-4587803B922E}"/>
+                <a16:creationId xmlns:a16="http://schemas.microsoft.com/office/drawing/2014/main" id="{1203CE01-3FF2-4A0B-A702-752348726ED3}"/>
               </a:ext>
             </a:extLst>
           </p:cNvPr>
@@ -11085,7 +11093,7 @@
           <p:cNvPr id="4" name="">
             <a:extLst xmlns:a="http://schemas.openxmlformats.org/drawingml/2006/main">
               <a:ext uri="{FF2B5EF4-FFF2-40B4-BE49-F238E27FC236}">
-                <a16:creationId xmlns:a16="http://schemas.microsoft.com/office/drawing/2014/main" id="{E0C9921A-08E1-457C-A003-A7ACCBA090F5}"/>
+                <a16:creationId xmlns:a16="http://schemas.microsoft.com/office/drawing/2014/main" id="{CDBB611C-DA2C-4466-A830-C05A9ECB8284}"/>
               </a:ext>
             </a:extLst>
           </p:cNvPr>
@@ -11142,7 +11150,7 @@
           <p:cNvPr id="5" name="">
             <a:extLst xmlns:a="http://schemas.openxmlformats.org/drawingml/2006/main">
               <a:ext uri="{FF2B5EF4-FFF2-40B4-BE49-F238E27FC236}">
-                <a16:creationId xmlns:a16="http://schemas.microsoft.com/office/drawing/2014/main" id="{19F02C84-FA0F-4C7C-A3B5-344B61A3A5E8}"/>
+                <a16:creationId xmlns:a16="http://schemas.microsoft.com/office/drawing/2014/main" id="{74A82788-8B3E-4356-8CD8-C5E513135EE3}"/>
               </a:ext>
             </a:extLst>
           </p:cNvPr>
@@ -11199,7 +11207,7 @@
           <p:cNvPr id="6" name="">
             <a:extLst xmlns:a="http://schemas.openxmlformats.org/drawingml/2006/main">
               <a:ext uri="{FF2B5EF4-FFF2-40B4-BE49-F238E27FC236}">
-                <a16:creationId xmlns:a16="http://schemas.microsoft.com/office/drawing/2014/main" id="{6CA37592-E1A1-4ABA-9DBC-733E50048CF1}"/>
+                <a16:creationId xmlns:a16="http://schemas.microsoft.com/office/drawing/2014/main" id="{5473FC13-04A2-4CBB-B020-C2B492F8B18C}"/>
               </a:ext>
             </a:extLst>
           </p:cNvPr>
@@ -11256,7 +11264,7 @@
           <p:cNvPr id="7" name="">
             <a:extLst xmlns:a="http://schemas.openxmlformats.org/drawingml/2006/main">
               <a:ext uri="{FF2B5EF4-FFF2-40B4-BE49-F238E27FC236}">
-                <a16:creationId xmlns:a16="http://schemas.microsoft.com/office/drawing/2014/main" id="{25BA357C-C065-4675-B9F0-4E3D280D23A8}"/>
+                <a16:creationId xmlns:a16="http://schemas.microsoft.com/office/drawing/2014/main" id="{7515F15A-C287-4F2A-93A8-FB340576AA03}"/>
               </a:ext>
             </a:extLst>
           </p:cNvPr>
@@ -11288,7 +11296,7 @@
           <p:cNvPr id="8" name="">
             <a:extLst xmlns:a="http://schemas.openxmlformats.org/drawingml/2006/main">
               <a:ext uri="{FF2B5EF4-FFF2-40B4-BE49-F238E27FC236}">
-                <a16:creationId xmlns:a16="http://schemas.microsoft.com/office/drawing/2014/main" id="{A217194C-7A93-400C-BFD0-3079299E2EF2}"/>
+                <a16:creationId xmlns:a16="http://schemas.microsoft.com/office/drawing/2014/main" id="{F9A4F212-9237-4586-AACA-FE9A5DF1A3FC}"/>
               </a:ext>
             </a:extLst>
           </p:cNvPr>
@@ -11345,7 +11353,7 @@
           <p:cNvPr id="9" name="">
             <a:extLst xmlns:a="http://schemas.openxmlformats.org/drawingml/2006/main">
               <a:ext uri="{FF2B5EF4-FFF2-40B4-BE49-F238E27FC236}">
-                <a16:creationId xmlns:a16="http://schemas.microsoft.com/office/drawing/2014/main" id="{86E46C32-E6A2-4703-918B-0BB4D19F2DB1}"/>
+                <a16:creationId xmlns:a16="http://schemas.microsoft.com/office/drawing/2014/main" id="{15430690-E5AA-43C4-A705-F20CA4EA6A9B}"/>
               </a:ext>
             </a:extLst>
           </p:cNvPr>
@@ -11406,7 +11414,7 @@
           <p:nvPr/>
         </p:nvPicPr>
         <p:blipFill>
-          <a:blip xmlns:r="http://schemas.openxmlformats.org/officeDocument/2006/relationships" xmlns:a="http://schemas.openxmlformats.org/drawingml/2006/main" r:embed="Rc132aab9c1254b6f"/>
+          <a:blip xmlns:r="http://schemas.openxmlformats.org/officeDocument/2006/relationships" xmlns:a="http://schemas.openxmlformats.org/drawingml/2006/main" r:embed="R6fc66668e8f344c8"/>
           <a:stretch xmlns:a="http://schemas.openxmlformats.org/drawingml/2006/main"/>
         </p:blipFill>
         <p:spPr>
@@ -11424,7 +11432,7 @@
           <p:cNvPr id="11" name="">
             <a:extLst xmlns:a="http://schemas.openxmlformats.org/drawingml/2006/main">
               <a:ext uri="{FF2B5EF4-FFF2-40B4-BE49-F238E27FC236}">
-                <a16:creationId xmlns:a16="http://schemas.microsoft.com/office/drawing/2014/main" id="{644776C4-C2F1-419C-B30B-6A4715966427}"/>
+                <a16:creationId xmlns:a16="http://schemas.microsoft.com/office/drawing/2014/main" id="{5617375E-1984-4F54-91CE-3A09E8E80678}"/>
               </a:ext>
             </a:extLst>
           </p:cNvPr>
@@ -11481,7 +11489,7 @@
           <p:cNvPr id="12" name="">
             <a:extLst xmlns:a="http://schemas.openxmlformats.org/drawingml/2006/main">
               <a:ext uri="{FF2B5EF4-FFF2-40B4-BE49-F238E27FC236}">
-                <a16:creationId xmlns:a16="http://schemas.microsoft.com/office/drawing/2014/main" id="{7C68BC3F-A7FB-42B3-BD64-E95B54D5BE58}"/>
+                <a16:creationId xmlns:a16="http://schemas.microsoft.com/office/drawing/2014/main" id="{71E15E36-98E2-4A2F-9356-D2872FA17C86}"/>
               </a:ext>
             </a:extLst>
           </p:cNvPr>
@@ -11538,7 +11546,7 @@
           <p:cNvPr id="13" name="">
             <a:extLst xmlns:a="http://schemas.openxmlformats.org/drawingml/2006/main">
               <a:ext uri="{FF2B5EF4-FFF2-40B4-BE49-F238E27FC236}">
-                <a16:creationId xmlns:a16="http://schemas.microsoft.com/office/drawing/2014/main" id="{851E129F-F7B4-42D5-802F-CA28F0C30AFA}"/>
+                <a16:creationId xmlns:a16="http://schemas.microsoft.com/office/drawing/2014/main" id="{A36E5C3F-7EE5-4EB3-9877-8A7772262808}"/>
               </a:ext>
             </a:extLst>
           </p:cNvPr>
@@ -11570,7 +11578,7 @@
           <p:cNvPr id="14" name="">
             <a:extLst xmlns:a="http://schemas.openxmlformats.org/drawingml/2006/main">
               <a:ext uri="{FF2B5EF4-FFF2-40B4-BE49-F238E27FC236}">
-                <a16:creationId xmlns:a16="http://schemas.microsoft.com/office/drawing/2014/main" id="{C4C0CF13-6E63-490B-8AE0-B768EC73804A}"/>
+                <a16:creationId xmlns:a16="http://schemas.microsoft.com/office/drawing/2014/main" id="{E3DB5702-845E-49B5-8DAC-36BFAA1CF2D3}"/>
               </a:ext>
             </a:extLst>
           </p:cNvPr>
@@ -11627,7 +11635,7 @@
           <p:cNvPr id="15" name="">
             <a:extLst xmlns:a="http://schemas.openxmlformats.org/drawingml/2006/main">
               <a:ext uri="{FF2B5EF4-FFF2-40B4-BE49-F238E27FC236}">
-                <a16:creationId xmlns:a16="http://schemas.microsoft.com/office/drawing/2014/main" id="{F3179B7A-3804-4A25-B7A4-DC9B430C1BBC}"/>
+                <a16:creationId xmlns:a16="http://schemas.microsoft.com/office/drawing/2014/main" id="{828EE2FD-3B5E-42B5-A23B-68443125928F}"/>
               </a:ext>
             </a:extLst>
           </p:cNvPr>
@@ -11682,7 +11690,7 @@
     </p:spTree>
     <p:extLst>
       <p:ext uri="{BB962C8B-B14F-4D97-AF65-F5344CB8AC3E}">
-        <p14:creationId xmlns:p14="http://schemas.microsoft.com/office/powerpoint/2010/main" val="1660066000"/>
+        <p14:creationId xmlns:p14="http://schemas.microsoft.com/office/powerpoint/2010/main" val="258059297"/>
       </p:ext>
     </p:extLst>
   </p:cSld>
@@ -11837,7 +11845,7 @@
           <p:cNvPr id="23" name="">
             <a:extLst xmlns:a="http://schemas.openxmlformats.org/drawingml/2006/main">
               <a:ext uri="{FF2B5EF4-FFF2-40B4-BE49-F238E27FC236}">
-                <a16:creationId xmlns:a16="http://schemas.microsoft.com/office/drawing/2014/main" id="{1BACE956-12A8-4302-B139-E9D78261F927}"/>
+                <a16:creationId xmlns:a16="http://schemas.microsoft.com/office/drawing/2014/main" id="{1E089A0B-2338-404D-96BC-1111430A33D0}"/>
               </a:ext>
             </a:extLst>
           </p:cNvPr>
@@ -11869,7 +11877,7 @@
           <p:cNvPr id="2" name="">
             <a:extLst xmlns:a="http://schemas.openxmlformats.org/drawingml/2006/main">
               <a:ext uri="{FF2B5EF4-FFF2-40B4-BE49-F238E27FC236}">
-                <a16:creationId xmlns:a16="http://schemas.microsoft.com/office/drawing/2014/main" id="{64CA4BAC-5F39-4BCC-B613-906273683764}"/>
+                <a16:creationId xmlns:a16="http://schemas.microsoft.com/office/drawing/2014/main" id="{BF175035-488C-45DF-88E5-6D9AFA9EB672}"/>
               </a:ext>
             </a:extLst>
           </p:cNvPr>
@@ -11926,7 +11934,7 @@
           <p:cNvPr id="3" name="">
             <a:extLst xmlns:a="http://schemas.openxmlformats.org/drawingml/2006/main">
               <a:ext uri="{FF2B5EF4-FFF2-40B4-BE49-F238E27FC236}">
-                <a16:creationId xmlns:a16="http://schemas.microsoft.com/office/drawing/2014/main" id="{75FBE65E-7C49-413C-9569-D8A588C2A595}"/>
+                <a16:creationId xmlns:a16="http://schemas.microsoft.com/office/drawing/2014/main" id="{C0CC7923-BA9E-4D5A-9013-C9AC0E4AE7BE}"/>
               </a:ext>
             </a:extLst>
           </p:cNvPr>
@@ -11958,7 +11966,7 @@
           <p:cNvPr id="4" name="">
             <a:extLst xmlns:a="http://schemas.openxmlformats.org/drawingml/2006/main">
               <a:ext uri="{FF2B5EF4-FFF2-40B4-BE49-F238E27FC236}">
-                <a16:creationId xmlns:a16="http://schemas.microsoft.com/office/drawing/2014/main" id="{91952EB2-0C6A-40DB-893C-1E9BB3874649}"/>
+                <a16:creationId xmlns:a16="http://schemas.microsoft.com/office/drawing/2014/main" id="{FB9F248B-2278-4870-AE2C-8759432DD170}"/>
               </a:ext>
             </a:extLst>
           </p:cNvPr>
@@ -12015,7 +12023,7 @@
           <p:cNvPr id="5" name="">
             <a:extLst xmlns:a="http://schemas.openxmlformats.org/drawingml/2006/main">
               <a:ext uri="{FF2B5EF4-FFF2-40B4-BE49-F238E27FC236}">
-                <a16:creationId xmlns:a16="http://schemas.microsoft.com/office/drawing/2014/main" id="{D26E9E45-8621-4D86-BAEB-B2A71D4DFCE1}"/>
+                <a16:creationId xmlns:a16="http://schemas.microsoft.com/office/drawing/2014/main" id="{22BE1BDD-7CC1-4632-99F4-8245E2377109}"/>
               </a:ext>
             </a:extLst>
           </p:cNvPr>
@@ -12072,7 +12080,7 @@
           <p:cNvPr id="6" name="">
             <a:extLst xmlns:a="http://schemas.openxmlformats.org/drawingml/2006/main">
               <a:ext uri="{FF2B5EF4-FFF2-40B4-BE49-F238E27FC236}">
-                <a16:creationId xmlns:a16="http://schemas.microsoft.com/office/drawing/2014/main" id="{E8873DDC-D80F-4880-BCE1-43837EA90F8F}"/>
+                <a16:creationId xmlns:a16="http://schemas.microsoft.com/office/drawing/2014/main" id="{4F26BDC3-A595-4D01-B527-266696FE59C8}"/>
               </a:ext>
             </a:extLst>
           </p:cNvPr>
@@ -12129,7 +12137,7 @@
           <p:cNvPr id="7" name="">
             <a:extLst xmlns:a="http://schemas.openxmlformats.org/drawingml/2006/main">
               <a:ext uri="{FF2B5EF4-FFF2-40B4-BE49-F238E27FC236}">
-                <a16:creationId xmlns:a16="http://schemas.microsoft.com/office/drawing/2014/main" id="{FA2E4DAF-6972-43DC-93A4-A08F92FEB9C6}"/>
+                <a16:creationId xmlns:a16="http://schemas.microsoft.com/office/drawing/2014/main" id="{37B76262-0C4C-43B5-BA10-3720F1C88F5C}"/>
               </a:ext>
             </a:extLst>
           </p:cNvPr>
@@ -12161,7 +12169,7 @@
           <p:cNvPr id="8" name="">
             <a:extLst xmlns:a="http://schemas.openxmlformats.org/drawingml/2006/main">
               <a:ext uri="{FF2B5EF4-FFF2-40B4-BE49-F238E27FC236}">
-                <a16:creationId xmlns:a16="http://schemas.microsoft.com/office/drawing/2014/main" id="{BBCCF184-5D9A-4F4C-92F0-207AA5F4E3AB}"/>
+                <a16:creationId xmlns:a16="http://schemas.microsoft.com/office/drawing/2014/main" id="{C81959EC-6AA5-4F9E-A0C6-9ECD61CFFE74}"/>
               </a:ext>
             </a:extLst>
           </p:cNvPr>
@@ -12218,7 +12226,7 @@
           <p:cNvPr id="9" name="">
             <a:extLst xmlns:a="http://schemas.openxmlformats.org/drawingml/2006/main">
               <a:ext uri="{FF2B5EF4-FFF2-40B4-BE49-F238E27FC236}">
-                <a16:creationId xmlns:a16="http://schemas.microsoft.com/office/drawing/2014/main" id="{FC8D75D9-8909-4DE6-8538-8D4A193D01E1}"/>
+                <a16:creationId xmlns:a16="http://schemas.microsoft.com/office/drawing/2014/main" id="{30FEE194-5731-4ABB-BBD6-9EE18A17C871}"/>
               </a:ext>
             </a:extLst>
           </p:cNvPr>
@@ -12275,7 +12283,7 @@
           <p:cNvPr id="10" name="">
             <a:extLst xmlns:a="http://schemas.openxmlformats.org/drawingml/2006/main">
               <a:ext uri="{FF2B5EF4-FFF2-40B4-BE49-F238E27FC236}">
-                <a16:creationId xmlns:a16="http://schemas.microsoft.com/office/drawing/2014/main" id="{AEFE3E6D-79D9-47FF-88EC-A55239B9F411}"/>
+                <a16:creationId xmlns:a16="http://schemas.microsoft.com/office/drawing/2014/main" id="{4CCB6F0A-611F-42FC-9009-94ED9725D31B}"/>
               </a:ext>
             </a:extLst>
           </p:cNvPr>
@@ -12309,7 +12317,7 @@
           <p:cNvPr id="11" name="">
             <a:extLst xmlns:a="http://schemas.openxmlformats.org/drawingml/2006/main">
               <a:ext uri="{FF2B5EF4-FFF2-40B4-BE49-F238E27FC236}">
-                <a16:creationId xmlns:a16="http://schemas.microsoft.com/office/drawing/2014/main" id="{650C3599-DA37-489F-A585-8690FFCFE3C3}"/>
+                <a16:creationId xmlns:a16="http://schemas.microsoft.com/office/drawing/2014/main" id="{D19582DF-4304-41F9-9834-959F2E600C01}"/>
               </a:ext>
             </a:extLst>
           </p:cNvPr>
@@ -12341,7 +12349,7 @@
           <p:cNvPr id="12" name="">
             <a:extLst xmlns:a="http://schemas.openxmlformats.org/drawingml/2006/main">
               <a:ext uri="{FF2B5EF4-FFF2-40B4-BE49-F238E27FC236}">
-                <a16:creationId xmlns:a16="http://schemas.microsoft.com/office/drawing/2014/main" id="{65FBC448-2AB0-4B00-A5DC-4A2250782A36}"/>
+                <a16:creationId xmlns:a16="http://schemas.microsoft.com/office/drawing/2014/main" id="{B229730C-9AC3-4C31-8CF2-461763E08397}"/>
               </a:ext>
             </a:extLst>
           </p:cNvPr>
@@ -12398,7 +12406,7 @@
           <p:cNvPr id="13" name="">
             <a:extLst xmlns:a="http://schemas.openxmlformats.org/drawingml/2006/main">
               <a:ext uri="{FF2B5EF4-FFF2-40B4-BE49-F238E27FC236}">
-                <a16:creationId xmlns:a16="http://schemas.microsoft.com/office/drawing/2014/main" id="{08DFFA41-E402-4D5A-8982-1FF126BE9A23}"/>
+                <a16:creationId xmlns:a16="http://schemas.microsoft.com/office/drawing/2014/main" id="{B4F20866-26D1-4246-89FD-51D1A4226394}"/>
               </a:ext>
             </a:extLst>
           </p:cNvPr>
@@ -12455,7 +12463,7 @@
           <p:cNvPr id="14" name="">
             <a:extLst xmlns:a="http://schemas.openxmlformats.org/drawingml/2006/main">
               <a:ext uri="{FF2B5EF4-FFF2-40B4-BE49-F238E27FC236}">
-                <a16:creationId xmlns:a16="http://schemas.microsoft.com/office/drawing/2014/main" id="{A0F04C0D-C2F8-404B-BA55-E7BFA0F341F0}"/>
+                <a16:creationId xmlns:a16="http://schemas.microsoft.com/office/drawing/2014/main" id="{25448405-6D40-42A7-84CF-DF9EAE347E7E}"/>
               </a:ext>
             </a:extLst>
           </p:cNvPr>
@@ -12489,7 +12497,7 @@
           <p:cNvPr id="15" name="">
             <a:extLst xmlns:a="http://schemas.openxmlformats.org/drawingml/2006/main">
               <a:ext uri="{FF2B5EF4-FFF2-40B4-BE49-F238E27FC236}">
-                <a16:creationId xmlns:a16="http://schemas.microsoft.com/office/drawing/2014/main" id="{DFB256E8-4DDE-4C47-A1DB-1E90F39B9649}"/>
+                <a16:creationId xmlns:a16="http://schemas.microsoft.com/office/drawing/2014/main" id="{FE6C2F1C-7C00-4E35-8B71-887EFE2A9AA3}"/>
               </a:ext>
             </a:extLst>
           </p:cNvPr>
@@ -12521,7 +12529,7 @@
           <p:cNvPr id="16" name="">
             <a:extLst xmlns:a="http://schemas.openxmlformats.org/drawingml/2006/main">
               <a:ext uri="{FF2B5EF4-FFF2-40B4-BE49-F238E27FC236}">
-                <a16:creationId xmlns:a16="http://schemas.microsoft.com/office/drawing/2014/main" id="{6C5C7A3D-59A4-4047-AD1F-662E3565D448}"/>
+                <a16:creationId xmlns:a16="http://schemas.microsoft.com/office/drawing/2014/main" id="{BF3389CD-E151-4B00-B55A-42470EC3E3E7}"/>
               </a:ext>
             </a:extLst>
           </p:cNvPr>
@@ -12578,7 +12586,7 @@
           <p:cNvPr id="17" name="">
             <a:extLst xmlns:a="http://schemas.openxmlformats.org/drawingml/2006/main">
               <a:ext uri="{FF2B5EF4-FFF2-40B4-BE49-F238E27FC236}">
-                <a16:creationId xmlns:a16="http://schemas.microsoft.com/office/drawing/2014/main" id="{DCB93020-3490-4F88-AEEA-845C2197AA51}"/>
+                <a16:creationId xmlns:a16="http://schemas.microsoft.com/office/drawing/2014/main" id="{44EC29EB-C0BA-4B9A-A9BB-E0A3E23ABD27}"/>
               </a:ext>
             </a:extLst>
           </p:cNvPr>
@@ -12635,7 +12643,7 @@
           <p:cNvPr id="18" name="">
             <a:extLst xmlns:a="http://schemas.openxmlformats.org/drawingml/2006/main">
               <a:ext uri="{FF2B5EF4-FFF2-40B4-BE49-F238E27FC236}">
-                <a16:creationId xmlns:a16="http://schemas.microsoft.com/office/drawing/2014/main" id="{92C58E7E-CEEC-4738-9E07-AC3B82929A1C}"/>
+                <a16:creationId xmlns:a16="http://schemas.microsoft.com/office/drawing/2014/main" id="{71BD5EB2-1A81-4D98-8CAF-DB4203EF76FE}"/>
               </a:ext>
             </a:extLst>
           </p:cNvPr>
@@ -12669,7 +12677,7 @@
           <p:cNvPr id="19" name="">
             <a:extLst xmlns:a="http://schemas.openxmlformats.org/drawingml/2006/main">
               <a:ext uri="{FF2B5EF4-FFF2-40B4-BE49-F238E27FC236}">
-                <a16:creationId xmlns:a16="http://schemas.microsoft.com/office/drawing/2014/main" id="{F3C9DA43-C7E8-484D-A298-1446C3E684C8}"/>
+                <a16:creationId xmlns:a16="http://schemas.microsoft.com/office/drawing/2014/main" id="{9A34B1D0-A803-4B49-A030-8AD1C2982ABE}"/>
               </a:ext>
             </a:extLst>
           </p:cNvPr>
@@ -12701,7 +12709,7 @@
           <p:cNvPr id="20" name="">
             <a:extLst xmlns:a="http://schemas.openxmlformats.org/drawingml/2006/main">
               <a:ext uri="{FF2B5EF4-FFF2-40B4-BE49-F238E27FC236}">
-                <a16:creationId xmlns:a16="http://schemas.microsoft.com/office/drawing/2014/main" id="{3D58169B-E7AC-4715-82F3-54742240EEDA}"/>
+                <a16:creationId xmlns:a16="http://schemas.microsoft.com/office/drawing/2014/main" id="{1357A75A-2C33-4F74-BAA7-0008F2360516}"/>
               </a:ext>
             </a:extLst>
           </p:cNvPr>
@@ -12758,7 +12766,7 @@
           <p:cNvPr id="21" name="">
             <a:extLst xmlns:a="http://schemas.openxmlformats.org/drawingml/2006/main">
               <a:ext uri="{FF2B5EF4-FFF2-40B4-BE49-F238E27FC236}">
-                <a16:creationId xmlns:a16="http://schemas.microsoft.com/office/drawing/2014/main" id="{C48F53C2-C068-407D-BEAC-8F325DB3FAEA}"/>
+                <a16:creationId xmlns:a16="http://schemas.microsoft.com/office/drawing/2014/main" id="{7DE37E2B-DFC7-4488-A5CE-130085842238}"/>
               </a:ext>
             </a:extLst>
           </p:cNvPr>
@@ -12815,7 +12823,7 @@
           <p:cNvPr id="22" name="">
             <a:extLst xmlns:a="http://schemas.openxmlformats.org/drawingml/2006/main">
               <a:ext uri="{FF2B5EF4-FFF2-40B4-BE49-F238E27FC236}">
-                <a16:creationId xmlns:a16="http://schemas.microsoft.com/office/drawing/2014/main" id="{D696D349-D63E-4FA1-A2AD-ABBD419C381A}"/>
+                <a16:creationId xmlns:a16="http://schemas.microsoft.com/office/drawing/2014/main" id="{97DD4B78-7436-4F67-9C07-B5E009503E67}"/>
               </a:ext>
             </a:extLst>
           </p:cNvPr>
@@ -12870,7 +12878,7 @@
     </p:spTree>
     <p:extLst>
       <p:ext uri="{BB962C8B-B14F-4D97-AF65-F5344CB8AC3E}">
-        <p14:creationId xmlns:p14="http://schemas.microsoft.com/office/powerpoint/2010/main" val="1757332113"/>
+        <p14:creationId xmlns:p14="http://schemas.microsoft.com/office/powerpoint/2010/main" val="1664271768"/>
       </p:ext>
     </p:extLst>
   </p:cSld>
@@ -13071,7 +13079,7 @@
           <p:cNvPr id="22" name="">
             <a:extLst xmlns:a="http://schemas.openxmlformats.org/drawingml/2006/main">
               <a:ext uri="{FF2B5EF4-FFF2-40B4-BE49-F238E27FC236}">
-                <a16:creationId xmlns:a16="http://schemas.microsoft.com/office/drawing/2014/main" id="{8A983EF9-0BB4-49BE-83B3-3CFBDE104893}"/>
+                <a16:creationId xmlns:a16="http://schemas.microsoft.com/office/drawing/2014/main" id="{D7465163-7C40-478B-84EB-E3773C023AA7}"/>
               </a:ext>
             </a:extLst>
           </p:cNvPr>
@@ -13103,7 +13111,7 @@
           <p:cNvPr id="2" name="">
             <a:extLst xmlns:a="http://schemas.openxmlformats.org/drawingml/2006/main">
               <a:ext uri="{FF2B5EF4-FFF2-40B4-BE49-F238E27FC236}">
-                <a16:creationId xmlns:a16="http://schemas.microsoft.com/office/drawing/2014/main" id="{73CBC9FD-A08D-412A-BD08-9E023EF9B16C}"/>
+                <a16:creationId xmlns:a16="http://schemas.microsoft.com/office/drawing/2014/main" id="{B7EDAA95-B999-4896-B6B8-157A8CAA7A34}"/>
               </a:ext>
             </a:extLst>
           </p:cNvPr>
@@ -13160,7 +13168,7 @@
           <p:cNvPr id="3" name="">
             <a:extLst xmlns:a="http://schemas.openxmlformats.org/drawingml/2006/main">
               <a:ext uri="{FF2B5EF4-FFF2-40B4-BE49-F238E27FC236}">
-                <a16:creationId xmlns:a16="http://schemas.microsoft.com/office/drawing/2014/main" id="{B4F667E2-8163-4C1B-B490-FE2829EEDAA8}"/>
+                <a16:creationId xmlns:a16="http://schemas.microsoft.com/office/drawing/2014/main" id="{08ED230A-00AF-41B5-8821-A2D72E470545}"/>
               </a:ext>
             </a:extLst>
           </p:cNvPr>
@@ -13192,7 +13200,7 @@
           <p:cNvPr id="4" name="">
             <a:extLst xmlns:a="http://schemas.openxmlformats.org/drawingml/2006/main">
               <a:ext uri="{FF2B5EF4-FFF2-40B4-BE49-F238E27FC236}">
-                <a16:creationId xmlns:a16="http://schemas.microsoft.com/office/drawing/2014/main" id="{A22A9777-267C-45E1-A4D4-6548B694D444}"/>
+                <a16:creationId xmlns:a16="http://schemas.microsoft.com/office/drawing/2014/main" id="{4116C7E9-A867-44EF-ACC2-B3EF78A83FA4}"/>
               </a:ext>
             </a:extLst>
           </p:cNvPr>
@@ -13249,7 +13257,7 @@
           <p:cNvPr id="5" name="">
             <a:extLst xmlns:a="http://schemas.openxmlformats.org/drawingml/2006/main">
               <a:ext uri="{FF2B5EF4-FFF2-40B4-BE49-F238E27FC236}">
-                <a16:creationId xmlns:a16="http://schemas.microsoft.com/office/drawing/2014/main" id="{76183A1E-FF84-4663-A0F0-9A65B5D34F8C}"/>
+                <a16:creationId xmlns:a16="http://schemas.microsoft.com/office/drawing/2014/main" id="{59010C54-4274-41A6-B7F7-A2FC7CB4FDB9}"/>
               </a:ext>
             </a:extLst>
           </p:cNvPr>
@@ -13306,7 +13314,7 @@
           <p:cNvPr id="6" name="">
             <a:extLst xmlns:a="http://schemas.openxmlformats.org/drawingml/2006/main">
               <a:ext uri="{FF2B5EF4-FFF2-40B4-BE49-F238E27FC236}">
-                <a16:creationId xmlns:a16="http://schemas.microsoft.com/office/drawing/2014/main" id="{759D7843-195D-40A3-BA7B-9B55B3812886}"/>
+                <a16:creationId xmlns:a16="http://schemas.microsoft.com/office/drawing/2014/main" id="{0A7EBA4C-4D65-48BB-9452-D2526A8EA93F}"/>
               </a:ext>
             </a:extLst>
           </p:cNvPr>
@@ -13363,7 +13371,7 @@
           <p:cNvPr id="7" name="">
             <a:extLst xmlns:a="http://schemas.openxmlformats.org/drawingml/2006/main">
               <a:ext uri="{FF2B5EF4-FFF2-40B4-BE49-F238E27FC236}">
-                <a16:creationId xmlns:a16="http://schemas.microsoft.com/office/drawing/2014/main" id="{F6DE69FF-CE13-4968-B744-F4FA8614ACFB}"/>
+                <a16:creationId xmlns:a16="http://schemas.microsoft.com/office/drawing/2014/main" id="{D248741D-6225-47B1-8068-0E49FC8058D8}"/>
               </a:ext>
             </a:extLst>
           </p:cNvPr>
@@ -13395,7 +13403,7 @@
           <p:cNvPr id="8" name="">
             <a:extLst xmlns:a="http://schemas.openxmlformats.org/drawingml/2006/main">
               <a:ext uri="{FF2B5EF4-FFF2-40B4-BE49-F238E27FC236}">
-                <a16:creationId xmlns:a16="http://schemas.microsoft.com/office/drawing/2014/main" id="{4FD43E03-0CBA-4F86-AF4D-2AD1C1E83E14}"/>
+                <a16:creationId xmlns:a16="http://schemas.microsoft.com/office/drawing/2014/main" id="{D24B8896-7830-4E12-B373-A236FFBA26A6}"/>
               </a:ext>
             </a:extLst>
           </p:cNvPr>
@@ -13452,7 +13460,7 @@
           <p:cNvPr id="9" name="">
             <a:extLst xmlns:a="http://schemas.openxmlformats.org/drawingml/2006/main">
               <a:ext uri="{FF2B5EF4-FFF2-40B4-BE49-F238E27FC236}">
-                <a16:creationId xmlns:a16="http://schemas.microsoft.com/office/drawing/2014/main" id="{84EEB944-3766-4847-8203-014C6E5D0FD7}"/>
+                <a16:creationId xmlns:a16="http://schemas.microsoft.com/office/drawing/2014/main" id="{1E6CAC0D-79A1-42A6-9C20-6B2868D5A9EA}"/>
               </a:ext>
             </a:extLst>
           </p:cNvPr>
@@ -13509,7 +13517,7 @@
           <p:cNvPr id="10" name="">
             <a:extLst xmlns:a="http://schemas.openxmlformats.org/drawingml/2006/main">
               <a:ext uri="{FF2B5EF4-FFF2-40B4-BE49-F238E27FC236}">
-                <a16:creationId xmlns:a16="http://schemas.microsoft.com/office/drawing/2014/main" id="{375C9EB3-D67E-46E0-848D-7A5E604366D6}"/>
+                <a16:creationId xmlns:a16="http://schemas.microsoft.com/office/drawing/2014/main" id="{2FD64341-03F8-4F8E-8A4A-D1D5155099FA}"/>
               </a:ext>
             </a:extLst>
           </p:cNvPr>
@@ -13543,7 +13551,7 @@
           <p:cNvPr id="11" name="">
             <a:extLst xmlns:a="http://schemas.openxmlformats.org/drawingml/2006/main">
               <a:ext uri="{FF2B5EF4-FFF2-40B4-BE49-F238E27FC236}">
-                <a16:creationId xmlns:a16="http://schemas.microsoft.com/office/drawing/2014/main" id="{3261CE7B-C83E-474A-9024-5C99D690E944}"/>
+                <a16:creationId xmlns:a16="http://schemas.microsoft.com/office/drawing/2014/main" id="{3429912D-2199-47E9-BA43-90D5AA2E29B0}"/>
               </a:ext>
             </a:extLst>
           </p:cNvPr>
@@ -13575,7 +13583,7 @@
           <p:cNvPr id="12" name="">
             <a:extLst xmlns:a="http://schemas.openxmlformats.org/drawingml/2006/main">
               <a:ext uri="{FF2B5EF4-FFF2-40B4-BE49-F238E27FC236}">
-                <a16:creationId xmlns:a16="http://schemas.microsoft.com/office/drawing/2014/main" id="{C7A902DF-8B6A-4F85-A09C-9C617E5F9D6F}"/>
+                <a16:creationId xmlns:a16="http://schemas.microsoft.com/office/drawing/2014/main" id="{CD1DC6F2-E833-42D9-B8E6-BDDDD1F824C1}"/>
               </a:ext>
             </a:extLst>
           </p:cNvPr>
@@ -13632,7 +13640,7 @@
           <p:cNvPr id="13" name="">
             <a:extLst xmlns:a="http://schemas.openxmlformats.org/drawingml/2006/main">
               <a:ext uri="{FF2B5EF4-FFF2-40B4-BE49-F238E27FC236}">
-                <a16:creationId xmlns:a16="http://schemas.microsoft.com/office/drawing/2014/main" id="{7F9215AC-89D3-44BF-B2AE-0CAD99B865AC}"/>
+                <a16:creationId xmlns:a16="http://schemas.microsoft.com/office/drawing/2014/main" id="{00A509A1-1727-4CF3-8AA3-570039AAE40F}"/>
               </a:ext>
             </a:extLst>
           </p:cNvPr>
@@ -13689,7 +13697,7 @@
           <p:cNvPr id="14" name="">
             <a:extLst xmlns:a="http://schemas.openxmlformats.org/drawingml/2006/main">
               <a:ext uri="{FF2B5EF4-FFF2-40B4-BE49-F238E27FC236}">
-                <a16:creationId xmlns:a16="http://schemas.microsoft.com/office/drawing/2014/main" id="{A8927E58-5C91-480B-874C-7E77C219F947}"/>
+                <a16:creationId xmlns:a16="http://schemas.microsoft.com/office/drawing/2014/main" id="{0F3E0E6E-A444-4817-9C7A-12A97FBE7149}"/>
               </a:ext>
             </a:extLst>
           </p:cNvPr>
@@ -13723,7 +13731,7 @@
           <p:cNvPr id="15" name="">
             <a:extLst xmlns:a="http://schemas.openxmlformats.org/drawingml/2006/main">
               <a:ext uri="{FF2B5EF4-FFF2-40B4-BE49-F238E27FC236}">
-                <a16:creationId xmlns:a16="http://schemas.microsoft.com/office/drawing/2014/main" id="{6C87428F-AB63-42CB-8BC7-9AD00BAC5122}"/>
+                <a16:creationId xmlns:a16="http://schemas.microsoft.com/office/drawing/2014/main" id="{69D63DA8-0CA9-4520-9AF4-44C003340011}"/>
               </a:ext>
             </a:extLst>
           </p:cNvPr>
@@ -13755,7 +13763,7 @@
           <p:cNvPr id="16" name="">
             <a:extLst xmlns:a="http://schemas.openxmlformats.org/drawingml/2006/main">
               <a:ext uri="{FF2B5EF4-FFF2-40B4-BE49-F238E27FC236}">
-                <a16:creationId xmlns:a16="http://schemas.microsoft.com/office/drawing/2014/main" id="{B1584AB8-D0EF-46E7-A550-140B26AE1CC8}"/>
+                <a16:creationId xmlns:a16="http://schemas.microsoft.com/office/drawing/2014/main" id="{988529EE-1A42-4710-9D59-F0C0C631E9E9}"/>
               </a:ext>
             </a:extLst>
           </p:cNvPr>
@@ -13812,7 +13820,7 @@
           <p:cNvPr id="17" name="">
             <a:extLst xmlns:a="http://schemas.openxmlformats.org/drawingml/2006/main">
               <a:ext uri="{FF2B5EF4-FFF2-40B4-BE49-F238E27FC236}">
-                <a16:creationId xmlns:a16="http://schemas.microsoft.com/office/drawing/2014/main" id="{A8FC9E5D-9E59-433D-9C8A-0B1FA6381BFB}"/>
+                <a16:creationId xmlns:a16="http://schemas.microsoft.com/office/drawing/2014/main" id="{F4748B4E-43BB-46D7-978F-7CD6B5FD11B0}"/>
               </a:ext>
             </a:extLst>
           </p:cNvPr>
@@ -13869,7 +13877,7 @@
           <p:cNvPr id="18" name="">
             <a:extLst xmlns:a="http://schemas.openxmlformats.org/drawingml/2006/main">
               <a:ext uri="{FF2B5EF4-FFF2-40B4-BE49-F238E27FC236}">
-                <a16:creationId xmlns:a16="http://schemas.microsoft.com/office/drawing/2014/main" id="{BAADE182-36FE-4B77-AE9E-31AF70CEF7A7}"/>
+                <a16:creationId xmlns:a16="http://schemas.microsoft.com/office/drawing/2014/main" id="{46F38450-8FA3-478E-910F-DE096657332C}"/>
               </a:ext>
             </a:extLst>
           </p:cNvPr>
@@ -13903,7 +13911,7 @@
           <p:cNvPr id="19" name="">
             <a:extLst xmlns:a="http://schemas.openxmlformats.org/drawingml/2006/main">
               <a:ext uri="{FF2B5EF4-FFF2-40B4-BE49-F238E27FC236}">
-                <a16:creationId xmlns:a16="http://schemas.microsoft.com/office/drawing/2014/main" id="{3D65F3D2-CE40-4269-AEA8-DF3A145D5236}"/>
+                <a16:creationId xmlns:a16="http://schemas.microsoft.com/office/drawing/2014/main" id="{C310DA62-F1D0-4F0B-BAAA-50B71E02DEBB}"/>
               </a:ext>
             </a:extLst>
           </p:cNvPr>
@@ -13935,7 +13943,7 @@
           <p:cNvPr id="20" name="">
             <a:extLst xmlns:a="http://schemas.openxmlformats.org/drawingml/2006/main">
               <a:ext uri="{FF2B5EF4-FFF2-40B4-BE49-F238E27FC236}">
-                <a16:creationId xmlns:a16="http://schemas.microsoft.com/office/drawing/2014/main" id="{30842A03-D264-4D5D-B833-268BE3934B34}"/>
+                <a16:creationId xmlns:a16="http://schemas.microsoft.com/office/drawing/2014/main" id="{B24F8F4F-9815-4F5C-9CE3-AD30984DF9F8}"/>
               </a:ext>
             </a:extLst>
           </p:cNvPr>
@@ -13992,7 +14000,7 @@
           <p:cNvPr id="21" name="">
             <a:extLst xmlns:a="http://schemas.openxmlformats.org/drawingml/2006/main">
               <a:ext uri="{FF2B5EF4-FFF2-40B4-BE49-F238E27FC236}">
-                <a16:creationId xmlns:a16="http://schemas.microsoft.com/office/drawing/2014/main" id="{379363F9-7FB0-4094-81E5-8DC522C4C0ED}"/>
+                <a16:creationId xmlns:a16="http://schemas.microsoft.com/office/drawing/2014/main" id="{265B92E4-85AC-409B-BE1E-5B684ABEC8A8}"/>
               </a:ext>
             </a:extLst>
           </p:cNvPr>
@@ -14047,7 +14055,7 @@
     </p:spTree>
     <p:extLst>
       <p:ext uri="{BB962C8B-B14F-4D97-AF65-F5344CB8AC3E}">
-        <p14:creationId xmlns:p14="http://schemas.microsoft.com/office/powerpoint/2010/main" val="1562930606"/>
+        <p14:creationId xmlns:p14="http://schemas.microsoft.com/office/powerpoint/2010/main" val="1563327330"/>
       </p:ext>
     </p:extLst>
   </p:cSld>
